--- a/cadrage/KWISMO_Presentation.pptx
+++ b/cadrage/KWISMO_Presentation.pptx
@@ -5,7 +5,7 @@
     <p:sldMasterId id="2147483648" r:id="rId1"/>
   </p:sldMasterIdLst>
   <p:notesMasterIdLst>
-    <p:notesMasterId r:id="rId30"/>
+    <p:notesMasterId r:id="rId28"/>
   </p:notesMasterIdLst>
   <p:sldIdLst>
     <p:sldId id="256" r:id="rId2"/>
@@ -29,13 +29,11 @@
     <p:sldId id="271" r:id="rId20"/>
     <p:sldId id="272" r:id="rId21"/>
     <p:sldId id="273" r:id="rId22"/>
-    <p:sldId id="274" r:id="rId23"/>
-    <p:sldId id="275" r:id="rId24"/>
-    <p:sldId id="276" r:id="rId25"/>
-    <p:sldId id="277" r:id="rId26"/>
-    <p:sldId id="278" r:id="rId27"/>
-    <p:sldId id="279" r:id="rId28"/>
-    <p:sldId id="280" r:id="rId29"/>
+    <p:sldId id="275" r:id="rId23"/>
+    <p:sldId id="276" r:id="rId24"/>
+    <p:sldId id="277" r:id="rId25"/>
+    <p:sldId id="278" r:id="rId26"/>
+    <p:sldId id="279" r:id="rId27"/>
   </p:sldIdLst>
   <p:sldSz cx="12192000" cy="6858000"/>
   <p:notesSz cx="6858000" cy="12192000"/>
@@ -1923,198 +1921,6 @@
     <p:extLst>
       <p:ext uri="{BB962C8B-B14F-4D97-AF65-F5344CB8AC3E}">
         <p14:creationId xmlns:p14="http://schemas.microsoft.com/office/powerpoint/2010/main" val="1024086991"/>
-      </p:ext>
-    </p:extLst>
-  </p:cSld>
-  <p:clrMapOvr>
-    <a:masterClrMapping/>
-  </p:clrMapOvr>
-</p:notes>
-</file>
-
-<file path=ppt/notesSlides/notesSlide27.xml><?xml version="1.0" encoding="utf-8"?>
-<p:notes xmlns:a="http://schemas.openxmlformats.org/drawingml/2006/main" xmlns:r="http://schemas.openxmlformats.org/officeDocument/2006/relationships" xmlns:p="http://schemas.openxmlformats.org/presentationml/2006/main">
-  <p:cSld>
-    <p:spTree>
-      <p:nvGrpSpPr>
-        <p:cNvPr id="1" name=""/>
-        <p:cNvGrpSpPr/>
-        <p:nvPr/>
-      </p:nvGrpSpPr>
-      <p:grpSpPr>
-        <a:xfrm>
-          <a:off x="0" y="0"/>
-          <a:ext cx="0" cy="0"/>
-          <a:chOff x="0" y="0"/>
-          <a:chExt cx="0" cy="0"/>
-        </a:xfrm>
-      </p:grpSpPr>
-      <p:sp>
-        <p:nvSpPr>
-          <p:cNvPr id="2" name="Slide Image Placeholder 1"/>
-          <p:cNvSpPr>
-            <a:spLocks noGrp="1" noRot="1" noChangeAspect="1"/>
-          </p:cNvSpPr>
-          <p:nvPr>
-            <p:ph type="sldImg"/>
-          </p:nvPr>
-        </p:nvSpPr>
-        <p:spPr/>
-      </p:sp>
-      <p:sp>
-        <p:nvSpPr>
-          <p:cNvPr id="3" name="Notes Placeholder 2"/>
-          <p:cNvSpPr>
-            <a:spLocks noGrp="1"/>
-          </p:cNvSpPr>
-          <p:nvPr>
-            <p:ph type="body" idx="1"/>
-          </p:nvPr>
-        </p:nvSpPr>
-        <p:spPr/>
-        <p:txBody>
-          <a:bodyPr/>
-          <a:lstStyle/>
-          <a:p>
-            <a:endParaRPr lang="en-US" dirty="0"/>
-          </a:p>
-        </p:txBody>
-      </p:sp>
-      <p:sp>
-        <p:nvSpPr>
-          <p:cNvPr id="4" name="Slide Number Placeholder 3"/>
-          <p:cNvSpPr>
-            <a:spLocks noGrp="1"/>
-          </p:cNvSpPr>
-          <p:nvPr>
-            <p:ph type="sldNum" sz="quarter" idx="10"/>
-          </p:nvPr>
-        </p:nvSpPr>
-        <p:spPr/>
-        <p:txBody>
-          <a:bodyPr/>
-          <a:lstStyle/>
-          <a:p>
-            <a:fld id="{F7021451-1387-4CA6-816F-3879F97B5CBC}" type="slidenum">
-              <a:rPr lang="en-US"/>
-              <a:t>27</a:t>
-            </a:fld>
-            <a:endParaRPr lang="en-US"/>
-          </a:p>
-        </p:txBody>
-      </p:sp>
-    </p:spTree>
-    <p:extLst>
-      <p:ext uri="{BB962C8B-B14F-4D97-AF65-F5344CB8AC3E}">
-        <p14:creationId xmlns:p14="http://schemas.microsoft.com/office/powerpoint/2010/main" val="1024086991"/>
-      </p:ext>
-    </p:extLst>
-  </p:cSld>
-  <p:clrMapOvr>
-    <a:masterClrMapping/>
-  </p:clrMapOvr>
-</p:notes>
-</file>
-
-<file path=ppt/notesSlides/notesSlide28.xml><?xml version="1.0" encoding="utf-8"?>
-<p:notes xmlns:a="http://schemas.openxmlformats.org/drawingml/2006/main" xmlns:r="http://schemas.openxmlformats.org/officeDocument/2006/relationships" xmlns:p="http://schemas.openxmlformats.org/presentationml/2006/main">
-  <p:cSld>
-    <p:spTree>
-      <p:nvGrpSpPr>
-        <p:cNvPr id="1" name="">
-          <a:extLst>
-            <a:ext uri="{FF2B5EF4-FFF2-40B4-BE49-F238E27FC236}">
-              <a16:creationId xmlns:a16="http://schemas.microsoft.com/office/drawing/2014/main" id="{85E11B58-3E98-A720-D261-D0BC79CA4AA2}"/>
-            </a:ext>
-          </a:extLst>
-        </p:cNvPr>
-        <p:cNvGrpSpPr/>
-        <p:nvPr/>
-      </p:nvGrpSpPr>
-      <p:grpSpPr>
-        <a:xfrm>
-          <a:off x="0" y="0"/>
-          <a:ext cx="0" cy="0"/>
-          <a:chOff x="0" y="0"/>
-          <a:chExt cx="0" cy="0"/>
-        </a:xfrm>
-      </p:grpSpPr>
-      <p:sp>
-        <p:nvSpPr>
-          <p:cNvPr id="2" name="Slide Image Placeholder 1">
-            <a:extLst>
-              <a:ext uri="{FF2B5EF4-FFF2-40B4-BE49-F238E27FC236}">
-                <a16:creationId xmlns:a16="http://schemas.microsoft.com/office/drawing/2014/main" id="{956617CF-76A0-BD76-4AFE-7123678F4026}"/>
-              </a:ext>
-            </a:extLst>
-          </p:cNvPr>
-          <p:cNvSpPr>
-            <a:spLocks noGrp="1" noRot="1" noChangeAspect="1"/>
-          </p:cNvSpPr>
-          <p:nvPr>
-            <p:ph type="sldImg"/>
-          </p:nvPr>
-        </p:nvSpPr>
-        <p:spPr/>
-      </p:sp>
-      <p:sp>
-        <p:nvSpPr>
-          <p:cNvPr id="3" name="Notes Placeholder 2">
-            <a:extLst>
-              <a:ext uri="{FF2B5EF4-FFF2-40B4-BE49-F238E27FC236}">
-                <a16:creationId xmlns:a16="http://schemas.microsoft.com/office/drawing/2014/main" id="{3E5174C3-F6C7-0AB9-2364-9CDDDBAB1558}"/>
-              </a:ext>
-            </a:extLst>
-          </p:cNvPr>
-          <p:cNvSpPr>
-            <a:spLocks noGrp="1"/>
-          </p:cNvSpPr>
-          <p:nvPr>
-            <p:ph type="body" idx="1"/>
-          </p:nvPr>
-        </p:nvSpPr>
-        <p:spPr/>
-        <p:txBody>
-          <a:bodyPr/>
-          <a:lstStyle/>
-          <a:p>
-            <a:endParaRPr lang="en-US" dirty="0"/>
-          </a:p>
-        </p:txBody>
-      </p:sp>
-      <p:sp>
-        <p:nvSpPr>
-          <p:cNvPr id="4" name="Slide Number Placeholder 3">
-            <a:extLst>
-              <a:ext uri="{FF2B5EF4-FFF2-40B4-BE49-F238E27FC236}">
-                <a16:creationId xmlns:a16="http://schemas.microsoft.com/office/drawing/2014/main" id="{964A35AD-8179-C69D-524B-5F20EE3F9A77}"/>
-              </a:ext>
-            </a:extLst>
-          </p:cNvPr>
-          <p:cNvSpPr>
-            <a:spLocks noGrp="1"/>
-          </p:cNvSpPr>
-          <p:nvPr>
-            <p:ph type="sldNum" sz="quarter" idx="10"/>
-          </p:nvPr>
-        </p:nvSpPr>
-        <p:spPr/>
-        <p:txBody>
-          <a:bodyPr/>
-          <a:lstStyle/>
-          <a:p>
-            <a:fld id="{F7021451-1387-4CA6-816F-3879F97B5CBC}" type="slidenum">
-              <a:rPr lang="en-US"/>
-              <a:t>28</a:t>
-            </a:fld>
-            <a:endParaRPr lang="en-US" dirty="0"/>
-          </a:p>
-        </p:txBody>
-      </p:sp>
-    </p:spTree>
-    <p:extLst>
-      <p:ext uri="{BB962C8B-B14F-4D97-AF65-F5344CB8AC3E}">
-        <p14:creationId xmlns:p14="http://schemas.microsoft.com/office/powerpoint/2010/main" val="1592100083"/>
       </p:ext>
     </p:extLst>
   </p:cSld>
@@ -3403,7 +3209,7 @@
               <a:buNone/>
             </a:pPr>
             <a:r>
-              <a:rPr lang="en-US" sz="1250" b="1" dirty="0">
+              <a:rPr lang="fr-FR" sz="1250" b="1" noProof="0" dirty="0">
                 <a:solidFill>
                   <a:srgbClr val="FFFFFF"/>
                 </a:solidFill>
@@ -3411,9 +3217,9 @@
                 <a:ea typeface="Calibri" pitchFamily="34" charset="-122"/>
                 <a:cs typeface="Calibri" pitchFamily="34" charset="-120"/>
               </a:rPr>
-              <a:t>Partenaire Orange Cameroun</a:t>
-            </a:r>
-            <a:endParaRPr lang="en-US" sz="1250" dirty="0"/>
+              <a:t>Partenaire Orange Digital Center</a:t>
+            </a:r>
+            <a:endParaRPr lang="fr-FR" sz="1250" noProof="0" dirty="0"/>
           </a:p>
         </p:txBody>
       </p:sp>
@@ -6882,7 +6688,7 @@
               <a:buNone/>
             </a:pPr>
             <a:r>
-              <a:rPr lang="en-US" sz="1500" dirty="0" err="1">
+              <a:rPr lang="en-US" sz="1500" dirty="0">
                 <a:solidFill>
                   <a:srgbClr val="C9CEDA"/>
                 </a:solidFill>
@@ -6890,18 +6696,7 @@
                 <a:ea typeface="Calibri" pitchFamily="34" charset="-122"/>
                 <a:cs typeface="Calibri" pitchFamily="34" charset="-120"/>
               </a:rPr>
-              <a:t>une</a:t>
-            </a:r>
-            <a:r>
-              <a:rPr lang="en-US" sz="1500" dirty="0">
-                <a:solidFill>
-                  <a:srgbClr val="C9CEDA"/>
-                </a:solidFill>
-                <a:latin typeface="Calibri" pitchFamily="34" charset="0"/>
-                <a:ea typeface="Calibri" pitchFamily="34" charset="-122"/>
-                <a:cs typeface="Calibri" pitchFamily="34" charset="-120"/>
-              </a:rPr>
-              <a:t> plateforme intelligente de prévention contre la fraude Mobile Money, avant, pendant et après l'appel.</a:t>
+              <a:t>Une plateforme intelligente de prévention contre la fraude Mobile Money, avant, pendant et après l'appel.</a:t>
             </a:r>
             <a:endParaRPr lang="en-US" sz="1500" dirty="0"/>
           </a:p>
@@ -10232,7 +10027,7 @@
               <a:buNone/>
             </a:pPr>
             <a:r>
-              <a:rPr lang="en-US" sz="1450" b="1" dirty="0">
+              <a:rPr lang="fr-FR" sz="1450" b="1" noProof="0" dirty="0">
                 <a:solidFill>
                   <a:srgbClr val="FFFFFF"/>
                 </a:solidFill>
@@ -10240,9 +10035,9 @@
                 <a:ea typeface="Calibri" pitchFamily="34" charset="-122"/>
                 <a:cs typeface="Calibri" pitchFamily="34" charset="-120"/>
               </a:rPr>
-              <a:t>Positionnement &amp; modèle économique</a:t>
-            </a:r>
-            <a:endParaRPr lang="en-US" sz="1450" dirty="0"/>
+              <a:t>Positionnement</a:t>
+            </a:r>
+            <a:endParaRPr lang="fr-FR" sz="1450" noProof="0" dirty="0"/>
           </a:p>
         </p:txBody>
       </p:sp>
@@ -10807,7 +10602,7 @@
               <a:buNone/>
             </a:pPr>
             <a:r>
-              <a:rPr lang="en-US" sz="4600" b="1" dirty="0">
+              <a:rPr lang="fr-FR" sz="4600" b="1" noProof="0" dirty="0">
                 <a:solidFill>
                   <a:srgbClr val="FFFFFF"/>
                 </a:solidFill>
@@ -10815,29 +10610,9 @@
                 <a:ea typeface="Montserrat" pitchFamily="34" charset="-122"/>
                 <a:cs typeface="Montserrat" pitchFamily="34" charset="-120"/>
               </a:rPr>
-              <a:t>Positionnement &amp;</a:t>
-            </a:r>
-            <a:endParaRPr lang="en-US" sz="4600" dirty="0"/>
-          </a:p>
-          <a:p>
-            <a:pPr marL="0" indent="0">
-              <a:lnSpc>
-                <a:spcPct val="105000"/>
-              </a:lnSpc>
-              <a:buNone/>
-            </a:pPr>
-            <a:r>
-              <a:rPr lang="en-US" sz="4600" b="1" dirty="0">
-                <a:solidFill>
-                  <a:srgbClr val="FFFFFF"/>
-                </a:solidFill>
-                <a:latin typeface="Montserrat" pitchFamily="34" charset="0"/>
-                <a:ea typeface="Montserrat" pitchFamily="34" charset="-122"/>
-                <a:cs typeface="Montserrat" pitchFamily="34" charset="-120"/>
-              </a:rPr>
-              <a:t>modèle économique</a:t>
-            </a:r>
-            <a:endParaRPr lang="en-US" sz="4600" dirty="0"/>
+              <a:t>Positionnement</a:t>
+            </a:r>
+            <a:endParaRPr lang="fr-FR" sz="4600" noProof="0" dirty="0"/>
           </a:p>
         </p:txBody>
       </p:sp>
@@ -10896,7 +10671,7 @@
               <a:buNone/>
             </a:pPr>
             <a:r>
-              <a:rPr lang="en-US" sz="1500" dirty="0">
+              <a:rPr lang="fr-FR" sz="1500" noProof="0" dirty="0">
                 <a:solidFill>
                   <a:srgbClr val="C9CEDA"/>
                 </a:solidFill>
@@ -10904,9 +10679,9 @@
                 <a:ea typeface="Calibri" pitchFamily="34" charset="-122"/>
                 <a:cs typeface="Calibri" pitchFamily="34" charset="-120"/>
               </a:rPr>
-              <a:t>KWISMO face à l'existant, et le modèle de revenus envisagé aux côtés d'Orange Cameroun.</a:t>
-            </a:r>
-            <a:endParaRPr lang="en-US" sz="1500" dirty="0"/>
+              <a:t>Ceux avec quoi KWISMO se différencie par rapport à la concurrence.</a:t>
+            </a:r>
+            <a:endParaRPr lang="fr-FR" sz="1500" noProof="0" dirty="0"/>
           </a:p>
         </p:txBody>
       </p:sp>
@@ -12372,997 +12147,6 @@
 </file>
 
 <file path=ppt/slides/slide22.xml><?xml version="1.0" encoding="utf-8"?>
-<p:sld xmlns:a="http://schemas.openxmlformats.org/drawingml/2006/main" xmlns:r="http://schemas.openxmlformats.org/officeDocument/2006/relationships" xmlns:p="http://schemas.openxmlformats.org/presentationml/2006/main" show="0">
-  <p:cSld name="Slide 19">
-    <p:bg>
-      <p:bgPr>
-        <a:solidFill>
-          <a:srgbClr val="1B2333"/>
-        </a:solidFill>
-        <a:effectLst/>
-      </p:bgPr>
-    </p:bg>
-    <p:spTree>
-      <p:nvGrpSpPr>
-        <p:cNvPr id="1" name=""/>
-        <p:cNvGrpSpPr/>
-        <p:nvPr/>
-      </p:nvGrpSpPr>
-      <p:grpSpPr>
-        <a:xfrm>
-          <a:off x="0" y="0"/>
-          <a:ext cx="0" cy="0"/>
-          <a:chOff x="0" y="0"/>
-          <a:chExt cx="0" cy="0"/>
-        </a:xfrm>
-      </p:grpSpPr>
-      <p:pic>
-        <p:nvPicPr>
-          <p:cNvPr id="33" name="Image 0" descr="/home/claude/work/bg/bg_content.png">
-            <a:extLst>
-              <a:ext uri="{FF2B5EF4-FFF2-40B4-BE49-F238E27FC236}">
-                <a16:creationId xmlns:a16="http://schemas.microsoft.com/office/drawing/2014/main" id="{6A200FC4-EE87-E4F8-C3D1-1EE552AC2020}"/>
-              </a:ext>
-            </a:extLst>
-          </p:cNvPr>
-          <p:cNvPicPr>
-            <a:picLocks noChangeAspect="1"/>
-          </p:cNvPicPr>
-          <p:nvPr/>
-        </p:nvPicPr>
-        <p:blipFill>
-          <a:blip r:embed="rId3"/>
-          <a:stretch>
-            <a:fillRect/>
-          </a:stretch>
-        </p:blipFill>
-        <p:spPr>
-          <a:xfrm>
-            <a:off x="0" y="0"/>
-            <a:ext cx="12191695" cy="6858000"/>
-          </a:xfrm>
-          <a:prstGeom prst="rect">
-            <a:avLst/>
-          </a:prstGeom>
-        </p:spPr>
-      </p:pic>
-      <p:sp>
-        <p:nvSpPr>
-          <p:cNvPr id="3" name="Text 0"/>
-          <p:cNvSpPr/>
-          <p:nvPr/>
-        </p:nvSpPr>
-        <p:spPr>
-          <a:xfrm>
-            <a:off x="502920" y="384048"/>
-            <a:ext cx="9144000" cy="310896"/>
-          </a:xfrm>
-          <a:prstGeom prst="rect">
-            <a:avLst/>
-          </a:prstGeom>
-          <a:noFill/>
-          <a:ln/>
-        </p:spPr>
-        <p:txBody>
-          <a:bodyPr wrap="square" lIns="0" tIns="0" rIns="0" bIns="0" rtlCol="0" anchor="ctr"/>
-          <a:lstStyle/>
-          <a:p>
-            <a:pPr marL="0" indent="0">
-              <a:buNone/>
-            </a:pPr>
-            <a:r>
-              <a:rPr lang="en-US" sz="1300" b="1" kern="0" spc="200" dirty="0">
-                <a:solidFill>
-                  <a:srgbClr val="FF7900"/>
-                </a:solidFill>
-                <a:latin typeface="Calibri" pitchFamily="34" charset="0"/>
-                <a:ea typeface="Calibri" pitchFamily="34" charset="-122"/>
-                <a:cs typeface="Calibri" pitchFamily="34" charset="-120"/>
-              </a:rPr>
-              <a:t>POSITIONNEMENT</a:t>
-            </a:r>
-            <a:endParaRPr lang="en-US" sz="1300" dirty="0"/>
-          </a:p>
-        </p:txBody>
-      </p:sp>
-      <p:sp>
-        <p:nvSpPr>
-          <p:cNvPr id="4" name="Text 1"/>
-          <p:cNvSpPr/>
-          <p:nvPr/>
-        </p:nvSpPr>
-        <p:spPr>
-          <a:xfrm>
-            <a:off x="502920" y="658368"/>
-            <a:ext cx="10607040" cy="685800"/>
-          </a:xfrm>
-          <a:prstGeom prst="rect">
-            <a:avLst/>
-          </a:prstGeom>
-          <a:noFill/>
-          <a:ln/>
-        </p:spPr>
-        <p:txBody>
-          <a:bodyPr wrap="square" lIns="0" tIns="0" rIns="0" bIns="0" rtlCol="0" anchor="ctr"/>
-          <a:lstStyle/>
-          <a:p>
-            <a:pPr marL="0" indent="0">
-              <a:buNone/>
-            </a:pPr>
-            <a:r>
-              <a:rPr lang="en-US" sz="2800" b="1" dirty="0">
-                <a:solidFill>
-                  <a:srgbClr val="FFFFFF"/>
-                </a:solidFill>
-                <a:latin typeface="Montserrat" pitchFamily="34" charset="0"/>
-                <a:ea typeface="Montserrat" pitchFamily="34" charset="-122"/>
-                <a:cs typeface="Montserrat" pitchFamily="34" charset="-120"/>
-              </a:rPr>
-              <a:t>Modèle économique envisagé</a:t>
-            </a:r>
-            <a:endParaRPr lang="en-US" sz="2800" dirty="0"/>
-          </a:p>
-        </p:txBody>
-      </p:sp>
-      <p:sp>
-        <p:nvSpPr>
-          <p:cNvPr id="5" name="Text 2"/>
-          <p:cNvSpPr/>
-          <p:nvPr/>
-        </p:nvSpPr>
-        <p:spPr>
-          <a:xfrm>
-            <a:off x="502920" y="1325880"/>
-            <a:ext cx="10607040" cy="457200"/>
-          </a:xfrm>
-          <a:prstGeom prst="rect">
-            <a:avLst/>
-          </a:prstGeom>
-          <a:noFill/>
-          <a:ln/>
-        </p:spPr>
-        <p:txBody>
-          <a:bodyPr wrap="square" lIns="0" tIns="0" rIns="0" bIns="0" rtlCol="0" anchor="ctr"/>
-          <a:lstStyle/>
-          <a:p>
-            <a:pPr marL="0" indent="0">
-              <a:buNone/>
-            </a:pPr>
-            <a:r>
-              <a:rPr lang="en-US" sz="1400" i="1" dirty="0">
-                <a:solidFill>
-                  <a:srgbClr val="FFFFFF"/>
-                </a:solidFill>
-                <a:latin typeface="Calibri" pitchFamily="34" charset="0"/>
-                <a:ea typeface="Calibri" pitchFamily="34" charset="-122"/>
-                <a:cs typeface="Calibri" pitchFamily="34" charset="-120"/>
-              </a:rPr>
-              <a:t>Un partenaire technique plutôt qu'un concurrent : KWISMO apporte une couche d'intelligence, Orange conserve la relation client.</a:t>
-            </a:r>
-            <a:endParaRPr lang="en-US" sz="1400" dirty="0"/>
-          </a:p>
-        </p:txBody>
-      </p:sp>
-      <p:grpSp>
-        <p:nvGrpSpPr>
-          <p:cNvPr id="29" name="Groupe 28">
-            <a:extLst>
-              <a:ext uri="{FF2B5EF4-FFF2-40B4-BE49-F238E27FC236}">
-                <a16:creationId xmlns:a16="http://schemas.microsoft.com/office/drawing/2014/main" id="{599C9EB4-6DA5-F0BB-7391-692A108EDE25}"/>
-              </a:ext>
-            </a:extLst>
-          </p:cNvPr>
-          <p:cNvGrpSpPr/>
-          <p:nvPr/>
-        </p:nvGrpSpPr>
-        <p:grpSpPr>
-          <a:xfrm>
-            <a:off x="502920" y="2057400"/>
-            <a:ext cx="2834640" cy="1371600"/>
-            <a:chOff x="606182" y="2057400"/>
-            <a:chExt cx="2834640" cy="1371600"/>
-          </a:xfrm>
-        </p:grpSpPr>
-        <p:sp>
-          <p:nvSpPr>
-            <p:cNvPr id="6" name="Shape 3"/>
-            <p:cNvSpPr/>
-            <p:nvPr/>
-          </p:nvSpPr>
-          <p:spPr>
-            <a:xfrm>
-              <a:off x="606182" y="2057400"/>
-              <a:ext cx="2834640" cy="1371600"/>
-            </a:xfrm>
-            <a:prstGeom prst="roundRect">
-              <a:avLst>
-                <a:gd name="adj" fmla="val 6000"/>
-              </a:avLst>
-            </a:prstGeom>
-            <a:solidFill>
-              <a:srgbClr val="232C42"/>
-            </a:solidFill>
-            <a:ln/>
-          </p:spPr>
-          <p:txBody>
-            <a:bodyPr/>
-            <a:lstStyle/>
-            <a:p>
-              <a:endParaRPr lang="fr-FR"/>
-            </a:p>
-          </p:txBody>
-        </p:sp>
-        <p:sp>
-          <p:nvSpPr>
-            <p:cNvPr id="7" name="Shape 4"/>
-            <p:cNvSpPr/>
-            <p:nvPr/>
-          </p:nvSpPr>
-          <p:spPr>
-            <a:xfrm>
-              <a:off x="1749182" y="2240280"/>
-              <a:ext cx="548640" cy="548640"/>
-            </a:xfrm>
-            <a:prstGeom prst="ellipse">
-              <a:avLst/>
-            </a:prstGeom>
-            <a:solidFill>
-              <a:srgbClr val="FF7900">
-                <a:alpha val="85000"/>
-              </a:srgbClr>
-            </a:solidFill>
-            <a:ln/>
-          </p:spPr>
-          <p:txBody>
-            <a:bodyPr/>
-            <a:lstStyle/>
-            <a:p>
-              <a:endParaRPr lang="fr-FR"/>
-            </a:p>
-          </p:txBody>
-        </p:sp>
-        <p:pic>
-          <p:nvPicPr>
-            <p:cNvPr id="8" name="Image 1" descr="/home/claude/work/icons/user_FFFFFF.png"/>
-            <p:cNvPicPr>
-              <a:picLocks noChangeAspect="1"/>
-            </p:cNvPicPr>
-            <p:nvPr/>
-          </p:nvPicPr>
-          <p:blipFill>
-            <a:blip r:embed="rId4"/>
-            <a:stretch>
-              <a:fillRect/>
-            </a:stretch>
-          </p:blipFill>
-          <p:spPr>
-            <a:xfrm>
-              <a:off x="1825991" y="2317090"/>
-              <a:ext cx="395021" cy="395021"/>
-            </a:xfrm>
-            <a:prstGeom prst="rect">
-              <a:avLst/>
-            </a:prstGeom>
-          </p:spPr>
-        </p:pic>
-        <p:sp>
-          <p:nvSpPr>
-            <p:cNvPr id="9" name="Text 5"/>
-            <p:cNvSpPr/>
-            <p:nvPr/>
-          </p:nvSpPr>
-          <p:spPr>
-            <a:xfrm>
-              <a:off x="743342" y="2880360"/>
-              <a:ext cx="2560320" cy="274320"/>
-            </a:xfrm>
-            <a:prstGeom prst="rect">
-              <a:avLst/>
-            </a:prstGeom>
-            <a:noFill/>
-            <a:ln/>
-          </p:spPr>
-          <p:txBody>
-            <a:bodyPr wrap="square" lIns="0" tIns="0" rIns="0" bIns="0" rtlCol="0" anchor="ctr"/>
-            <a:lstStyle/>
-            <a:p>
-              <a:pPr marL="0" indent="0" algn="ctr">
-                <a:buNone/>
-              </a:pPr>
-              <a:r>
-                <a:rPr lang="en-US" sz="1350" b="1" dirty="0">
-                  <a:solidFill>
-                    <a:srgbClr val="FFFFFF"/>
-                  </a:solidFill>
-                  <a:latin typeface="Calibri" pitchFamily="34" charset="0"/>
-                  <a:ea typeface="Calibri" pitchFamily="34" charset="-122"/>
-                  <a:cs typeface="Calibri" pitchFamily="34" charset="-120"/>
-                </a:rPr>
-                <a:t>Utilisateur</a:t>
-              </a:r>
-              <a:endParaRPr lang="en-US" sz="1350" dirty="0"/>
-            </a:p>
-          </p:txBody>
-        </p:sp>
-        <p:sp>
-          <p:nvSpPr>
-            <p:cNvPr id="10" name="Text 6"/>
-            <p:cNvSpPr/>
-            <p:nvPr/>
-          </p:nvSpPr>
-          <p:spPr>
-            <a:xfrm>
-              <a:off x="743342" y="3136392"/>
-              <a:ext cx="2560320" cy="292608"/>
-            </a:xfrm>
-            <a:prstGeom prst="rect">
-              <a:avLst/>
-            </a:prstGeom>
-            <a:noFill/>
-            <a:ln/>
-          </p:spPr>
-          <p:txBody>
-            <a:bodyPr wrap="square" lIns="0" tIns="0" rIns="0" bIns="0" rtlCol="0" anchor="ctr"/>
-            <a:lstStyle/>
-            <a:p>
-              <a:pPr marL="0" indent="0" algn="ctr">
-                <a:buNone/>
-              </a:pPr>
-              <a:r>
-                <a:rPr lang="en-US" sz="1050" dirty="0">
-                  <a:solidFill>
-                    <a:srgbClr val="C9CEDA"/>
-                  </a:solidFill>
-                  <a:latin typeface="Calibri" pitchFamily="34" charset="0"/>
-                  <a:ea typeface="Calibri" pitchFamily="34" charset="-122"/>
-                  <a:cs typeface="Calibri" pitchFamily="34" charset="-120"/>
-                </a:rPr>
-                <a:t>Abonné à « KWISMO Security+ »</a:t>
-              </a:r>
-              <a:endParaRPr lang="en-US" sz="1050" dirty="0"/>
-            </a:p>
-          </p:txBody>
-        </p:sp>
-      </p:grpSp>
-      <p:pic>
-        <p:nvPicPr>
-          <p:cNvPr id="11" name="Image 2" descr="/home/claude/work/icons/arrowright_C9CEDA.png"/>
-          <p:cNvPicPr>
-            <a:picLocks noChangeAspect="1"/>
-          </p:cNvPicPr>
-          <p:nvPr/>
-        </p:nvPicPr>
-        <p:blipFill>
-          <a:blip r:embed="rId5"/>
-          <a:stretch>
-            <a:fillRect/>
-          </a:stretch>
-        </p:blipFill>
-        <p:spPr>
-          <a:xfrm>
-            <a:off x="3680460" y="2560320"/>
-            <a:ext cx="365760" cy="365760"/>
-          </a:xfrm>
-          <a:prstGeom prst="rect">
-            <a:avLst/>
-          </a:prstGeom>
-        </p:spPr>
-      </p:pic>
-      <p:grpSp>
-        <p:nvGrpSpPr>
-          <p:cNvPr id="31" name="Groupe 30">
-            <a:extLst>
-              <a:ext uri="{FF2B5EF4-FFF2-40B4-BE49-F238E27FC236}">
-                <a16:creationId xmlns:a16="http://schemas.microsoft.com/office/drawing/2014/main" id="{E4EF02CA-BA1C-6937-F783-9A6B3CEBACD7}"/>
-              </a:ext>
-            </a:extLst>
-          </p:cNvPr>
-          <p:cNvGrpSpPr/>
-          <p:nvPr/>
-        </p:nvGrpSpPr>
-        <p:grpSpPr>
-          <a:xfrm>
-            <a:off x="4389120" y="2057400"/>
-            <a:ext cx="2834640" cy="1371600"/>
-            <a:chOff x="4355222" y="2057400"/>
-            <a:chExt cx="2834640" cy="1371600"/>
-          </a:xfrm>
-        </p:grpSpPr>
-        <p:sp>
-          <p:nvSpPr>
-            <p:cNvPr id="12" name="Shape 7"/>
-            <p:cNvSpPr/>
-            <p:nvPr/>
-          </p:nvSpPr>
-          <p:spPr>
-            <a:xfrm>
-              <a:off x="4355222" y="2057400"/>
-              <a:ext cx="2834640" cy="1371600"/>
-            </a:xfrm>
-            <a:prstGeom prst="roundRect">
-              <a:avLst>
-                <a:gd name="adj" fmla="val 6000"/>
-              </a:avLst>
-            </a:prstGeom>
-            <a:solidFill>
-              <a:srgbClr val="232C42"/>
-            </a:solidFill>
-            <a:ln/>
-          </p:spPr>
-          <p:txBody>
-            <a:bodyPr/>
-            <a:lstStyle/>
-            <a:p>
-              <a:endParaRPr lang="fr-FR"/>
-            </a:p>
-          </p:txBody>
-        </p:sp>
-        <p:sp>
-          <p:nvSpPr>
-            <p:cNvPr id="13" name="Shape 8"/>
-            <p:cNvSpPr/>
-            <p:nvPr/>
-          </p:nvSpPr>
-          <p:spPr>
-            <a:xfrm>
-              <a:off x="5498222" y="2240280"/>
-              <a:ext cx="548640" cy="548640"/>
-            </a:xfrm>
-            <a:prstGeom prst="ellipse">
-              <a:avLst/>
-            </a:prstGeom>
-            <a:solidFill>
-              <a:srgbClr val="4D6AB1">
-                <a:alpha val="85000"/>
-              </a:srgbClr>
-            </a:solidFill>
-            <a:ln/>
-          </p:spPr>
-          <p:txBody>
-            <a:bodyPr/>
-            <a:lstStyle/>
-            <a:p>
-              <a:endParaRPr lang="fr-FR"/>
-            </a:p>
-          </p:txBody>
-        </p:sp>
-        <p:pic>
-          <p:nvPicPr>
-            <p:cNvPr id="14" name="Image 3" descr="/home/claude/work/icons/briefcase_FFFFFF.png"/>
-            <p:cNvPicPr>
-              <a:picLocks noChangeAspect="1"/>
-            </p:cNvPicPr>
-            <p:nvPr/>
-          </p:nvPicPr>
-          <p:blipFill>
-            <a:blip r:embed="rId6"/>
-            <a:stretch>
-              <a:fillRect/>
-            </a:stretch>
-          </p:blipFill>
-          <p:spPr>
-            <a:xfrm>
-              <a:off x="5575031" y="2317090"/>
-              <a:ext cx="395021" cy="395021"/>
-            </a:xfrm>
-            <a:prstGeom prst="rect">
-              <a:avLst/>
-            </a:prstGeom>
-          </p:spPr>
-        </p:pic>
-        <p:sp>
-          <p:nvSpPr>
-            <p:cNvPr id="15" name="Text 9"/>
-            <p:cNvSpPr/>
-            <p:nvPr/>
-          </p:nvSpPr>
-          <p:spPr>
-            <a:xfrm>
-              <a:off x="4492382" y="2880360"/>
-              <a:ext cx="2560320" cy="274320"/>
-            </a:xfrm>
-            <a:prstGeom prst="rect">
-              <a:avLst/>
-            </a:prstGeom>
-            <a:noFill/>
-            <a:ln/>
-          </p:spPr>
-          <p:txBody>
-            <a:bodyPr wrap="square" lIns="0" tIns="0" rIns="0" bIns="0" rtlCol="0" anchor="ctr"/>
-            <a:lstStyle/>
-            <a:p>
-              <a:pPr marL="0" indent="0" algn="ctr">
-                <a:buNone/>
-              </a:pPr>
-              <a:r>
-                <a:rPr lang="en-US" sz="1350" b="1" dirty="0">
-                  <a:solidFill>
-                    <a:srgbClr val="FFFFFF"/>
-                  </a:solidFill>
-                  <a:latin typeface="Calibri" pitchFamily="34" charset="0"/>
-                  <a:ea typeface="Calibri" pitchFamily="34" charset="-122"/>
-                  <a:cs typeface="Calibri" pitchFamily="34" charset="-120"/>
-                </a:rPr>
-                <a:t>Orange Cameroun</a:t>
-              </a:r>
-              <a:endParaRPr lang="en-US" sz="1350" dirty="0"/>
-            </a:p>
-          </p:txBody>
-        </p:sp>
-        <p:sp>
-          <p:nvSpPr>
-            <p:cNvPr id="16" name="Text 10"/>
-            <p:cNvSpPr/>
-            <p:nvPr/>
-          </p:nvSpPr>
-          <p:spPr>
-            <a:xfrm>
-              <a:off x="4492382" y="3136392"/>
-              <a:ext cx="2560320" cy="292608"/>
-            </a:xfrm>
-            <a:prstGeom prst="rect">
-              <a:avLst/>
-            </a:prstGeom>
-            <a:noFill/>
-            <a:ln/>
-          </p:spPr>
-          <p:txBody>
-            <a:bodyPr wrap="square" lIns="0" tIns="0" rIns="0" bIns="0" rtlCol="0" anchor="ctr"/>
-            <a:lstStyle/>
-            <a:p>
-              <a:pPr marL="0" indent="0" algn="ctr">
-                <a:buNone/>
-              </a:pPr>
-              <a:r>
-                <a:rPr lang="en-US" sz="1050" dirty="0">
-                  <a:solidFill>
-                    <a:srgbClr val="C9CEDA"/>
-                  </a:solidFill>
-                  <a:latin typeface="Calibri" pitchFamily="34" charset="0"/>
-                  <a:ea typeface="Calibri" pitchFamily="34" charset="-122"/>
-                  <a:cs typeface="Calibri" pitchFamily="34" charset="-120"/>
-                </a:rPr>
-                <a:t>Facturation &amp; stratégie commerciale</a:t>
-              </a:r>
-              <a:endParaRPr lang="en-US" sz="1050" dirty="0"/>
-            </a:p>
-          </p:txBody>
-        </p:sp>
-      </p:grpSp>
-      <p:pic>
-        <p:nvPicPr>
-          <p:cNvPr id="17" name="Image 4" descr="/home/claude/work/icons/arrowright_C9CEDA.png"/>
-          <p:cNvPicPr>
-            <a:picLocks noChangeAspect="1"/>
-          </p:cNvPicPr>
-          <p:nvPr/>
-        </p:nvPicPr>
-        <p:blipFill>
-          <a:blip r:embed="rId5"/>
-          <a:stretch>
-            <a:fillRect/>
-          </a:stretch>
-        </p:blipFill>
-        <p:spPr>
-          <a:xfrm>
-            <a:off x="7566660" y="2560320"/>
-            <a:ext cx="365760" cy="365760"/>
-          </a:xfrm>
-          <a:prstGeom prst="rect">
-            <a:avLst/>
-          </a:prstGeom>
-        </p:spPr>
-      </p:pic>
-      <p:grpSp>
-        <p:nvGrpSpPr>
-          <p:cNvPr id="30" name="Groupe 29">
-            <a:extLst>
-              <a:ext uri="{FF2B5EF4-FFF2-40B4-BE49-F238E27FC236}">
-                <a16:creationId xmlns:a16="http://schemas.microsoft.com/office/drawing/2014/main" id="{5762508C-30CF-06FF-24A5-217FC5CC9C8F}"/>
-              </a:ext>
-            </a:extLst>
-          </p:cNvPr>
-          <p:cNvGrpSpPr/>
-          <p:nvPr/>
-        </p:nvGrpSpPr>
-        <p:grpSpPr>
-          <a:xfrm>
-            <a:off x="8275320" y="2057400"/>
-            <a:ext cx="2834640" cy="1371600"/>
-            <a:chOff x="8104262" y="2057400"/>
-            <a:chExt cx="2834640" cy="1371600"/>
-          </a:xfrm>
-        </p:grpSpPr>
-        <p:sp>
-          <p:nvSpPr>
-            <p:cNvPr id="18" name="Shape 11"/>
-            <p:cNvSpPr/>
-            <p:nvPr/>
-          </p:nvSpPr>
-          <p:spPr>
-            <a:xfrm>
-              <a:off x="8104262" y="2057400"/>
-              <a:ext cx="2834640" cy="1371600"/>
-            </a:xfrm>
-            <a:prstGeom prst="roundRect">
-              <a:avLst>
-                <a:gd name="adj" fmla="val 6000"/>
-              </a:avLst>
-            </a:prstGeom>
-            <a:solidFill>
-              <a:srgbClr val="232C42"/>
-            </a:solidFill>
-            <a:ln/>
-          </p:spPr>
-          <p:txBody>
-            <a:bodyPr/>
-            <a:lstStyle/>
-            <a:p>
-              <a:endParaRPr lang="fr-FR"/>
-            </a:p>
-          </p:txBody>
-        </p:sp>
-        <p:sp>
-          <p:nvSpPr>
-            <p:cNvPr id="19" name="Shape 12"/>
-            <p:cNvSpPr/>
-            <p:nvPr/>
-          </p:nvSpPr>
-          <p:spPr>
-            <a:xfrm>
-              <a:off x="9247262" y="2240280"/>
-              <a:ext cx="548640" cy="548640"/>
-            </a:xfrm>
-            <a:prstGeom prst="ellipse">
-              <a:avLst/>
-            </a:prstGeom>
-            <a:solidFill>
-              <a:srgbClr val="F6A020">
-                <a:alpha val="85000"/>
-              </a:srgbClr>
-            </a:solidFill>
-            <a:ln/>
-          </p:spPr>
-          <p:txBody>
-            <a:bodyPr/>
-            <a:lstStyle/>
-            <a:p>
-              <a:endParaRPr lang="fr-FR"/>
-            </a:p>
-          </p:txBody>
-        </p:sp>
-        <p:pic>
-          <p:nvPicPr>
-            <p:cNvPr id="20" name="Image 5" descr="/home/claude/work/icons/shield_FFFFFF.png"/>
-            <p:cNvPicPr>
-              <a:picLocks noChangeAspect="1"/>
-            </p:cNvPicPr>
-            <p:nvPr/>
-          </p:nvPicPr>
-          <p:blipFill>
-            <a:blip r:embed="rId7"/>
-            <a:stretch>
-              <a:fillRect/>
-            </a:stretch>
-          </p:blipFill>
-          <p:spPr>
-            <a:xfrm>
-              <a:off x="9324071" y="2317090"/>
-              <a:ext cx="395021" cy="395021"/>
-            </a:xfrm>
-            <a:prstGeom prst="rect">
-              <a:avLst/>
-            </a:prstGeom>
-          </p:spPr>
-        </p:pic>
-        <p:sp>
-          <p:nvSpPr>
-            <p:cNvPr id="21" name="Text 13"/>
-            <p:cNvSpPr/>
-            <p:nvPr/>
-          </p:nvSpPr>
-          <p:spPr>
-            <a:xfrm>
-              <a:off x="8241422" y="2880360"/>
-              <a:ext cx="2560320" cy="274320"/>
-            </a:xfrm>
-            <a:prstGeom prst="rect">
-              <a:avLst/>
-            </a:prstGeom>
-            <a:noFill/>
-            <a:ln/>
-          </p:spPr>
-          <p:txBody>
-            <a:bodyPr wrap="square" lIns="0" tIns="0" rIns="0" bIns="0" rtlCol="0" anchor="ctr"/>
-            <a:lstStyle/>
-            <a:p>
-              <a:pPr marL="0" indent="0" algn="ctr">
-                <a:buNone/>
-              </a:pPr>
-              <a:r>
-                <a:rPr lang="en-US" sz="1350" b="1" dirty="0">
-                  <a:solidFill>
-                    <a:srgbClr val="FFFFFF"/>
-                  </a:solidFill>
-                  <a:latin typeface="Calibri" pitchFamily="34" charset="0"/>
-                  <a:ea typeface="Calibri" pitchFamily="34" charset="-122"/>
-                  <a:cs typeface="Calibri" pitchFamily="34" charset="-120"/>
-                </a:rPr>
-                <a:t>KWISMO</a:t>
-              </a:r>
-              <a:endParaRPr lang="en-US" sz="1350" dirty="0"/>
-            </a:p>
-          </p:txBody>
-        </p:sp>
-        <p:sp>
-          <p:nvSpPr>
-            <p:cNvPr id="22" name="Text 14"/>
-            <p:cNvSpPr/>
-            <p:nvPr/>
-          </p:nvSpPr>
-          <p:spPr>
-            <a:xfrm>
-              <a:off x="8241422" y="3136392"/>
-              <a:ext cx="2560320" cy="292608"/>
-            </a:xfrm>
-            <a:prstGeom prst="rect">
-              <a:avLst/>
-            </a:prstGeom>
-            <a:noFill/>
-            <a:ln/>
-          </p:spPr>
-          <p:txBody>
-            <a:bodyPr wrap="square" lIns="0" tIns="0" rIns="0" bIns="0" rtlCol="0" anchor="ctr"/>
-            <a:lstStyle/>
-            <a:p>
-              <a:pPr marL="0" indent="0" algn="ctr">
-                <a:buNone/>
-              </a:pPr>
-              <a:r>
-                <a:rPr lang="en-US" sz="1050" dirty="0">
-                  <a:solidFill>
-                    <a:srgbClr val="C9CEDA"/>
-                  </a:solidFill>
-                  <a:latin typeface="Calibri" pitchFamily="34" charset="0"/>
-                  <a:ea typeface="Calibri" pitchFamily="34" charset="-122"/>
-                  <a:cs typeface="Calibri" pitchFamily="34" charset="-120"/>
-                </a:rPr>
-                <a:t>Pourcentage négocié des revenus</a:t>
-              </a:r>
-              <a:endParaRPr lang="en-US" sz="1050" dirty="0"/>
-            </a:p>
-          </p:txBody>
-        </p:sp>
-      </p:grpSp>
-      <p:sp>
-        <p:nvSpPr>
-          <p:cNvPr id="23" name="Shape 15"/>
-          <p:cNvSpPr/>
-          <p:nvPr/>
-        </p:nvSpPr>
-        <p:spPr>
-          <a:xfrm>
-            <a:off x="502920" y="3977640"/>
-            <a:ext cx="10607040" cy="2148840"/>
-          </a:xfrm>
-          <a:prstGeom prst="roundRect">
-            <a:avLst>
-              <a:gd name="adj" fmla="val 3830"/>
-            </a:avLst>
-          </a:prstGeom>
-          <a:solidFill>
-            <a:srgbClr val="232C42"/>
-          </a:solidFill>
-          <a:ln/>
-        </p:spPr>
-        <p:txBody>
-          <a:bodyPr/>
-          <a:lstStyle/>
-          <a:p>
-            <a:endParaRPr lang="fr-FR"/>
-          </a:p>
-        </p:txBody>
-      </p:sp>
-      <p:sp>
-        <p:nvSpPr>
-          <p:cNvPr id="24" name="Text 16"/>
-          <p:cNvSpPr/>
-          <p:nvPr/>
-        </p:nvSpPr>
-        <p:spPr>
-          <a:xfrm>
-            <a:off x="822960" y="4297680"/>
-            <a:ext cx="4572000" cy="914400"/>
-          </a:xfrm>
-          <a:prstGeom prst="rect">
-            <a:avLst/>
-          </a:prstGeom>
-          <a:noFill/>
-          <a:ln/>
-        </p:spPr>
-        <p:txBody>
-          <a:bodyPr wrap="square" lIns="0" tIns="0" rIns="0" bIns="0" rtlCol="0" anchor="ctr"/>
-          <a:lstStyle/>
-          <a:p>
-            <a:pPr marL="0" indent="0">
-              <a:buNone/>
-            </a:pPr>
-            <a:r>
-              <a:rPr lang="en-US" sz="4000" b="1" dirty="0">
-                <a:solidFill>
-                  <a:srgbClr val="FF7900"/>
-                </a:solidFill>
-                <a:latin typeface="Montserrat" pitchFamily="34" charset="0"/>
-                <a:ea typeface="Montserrat" pitchFamily="34" charset="-122"/>
-                <a:cs typeface="Montserrat" pitchFamily="34" charset="-120"/>
-              </a:rPr>
-              <a:t>≈ 200 FCFA</a:t>
-            </a:r>
-            <a:endParaRPr lang="en-US" sz="4000" dirty="0"/>
-          </a:p>
-        </p:txBody>
-      </p:sp>
-      <p:sp>
-        <p:nvSpPr>
-          <p:cNvPr id="25" name="Text 17"/>
-          <p:cNvSpPr/>
-          <p:nvPr/>
-        </p:nvSpPr>
-        <p:spPr>
-          <a:xfrm>
-            <a:off x="822960" y="5212080"/>
-            <a:ext cx="4572000" cy="320040"/>
-          </a:xfrm>
-          <a:prstGeom prst="rect">
-            <a:avLst/>
-          </a:prstGeom>
-          <a:noFill/>
-          <a:ln/>
-        </p:spPr>
-        <p:txBody>
-          <a:bodyPr wrap="square" lIns="0" tIns="0" rIns="0" bIns="0" rtlCol="0" anchor="ctr"/>
-          <a:lstStyle/>
-          <a:p>
-            <a:pPr marL="0" indent="0">
-              <a:buNone/>
-            </a:pPr>
-            <a:r>
-              <a:rPr lang="en-US" sz="1250" dirty="0">
-                <a:solidFill>
-                  <a:srgbClr val="C9CEDA"/>
-                </a:solidFill>
-                <a:latin typeface="Calibri" pitchFamily="34" charset="0"/>
-                <a:ea typeface="Calibri" pitchFamily="34" charset="-122"/>
-                <a:cs typeface="Calibri" pitchFamily="34" charset="-120"/>
-              </a:rPr>
-              <a:t>/ mois — hypothèse de travail</a:t>
-            </a:r>
-            <a:endParaRPr lang="en-US" sz="1250" dirty="0"/>
-          </a:p>
-        </p:txBody>
-      </p:sp>
-      <p:sp>
-        <p:nvSpPr>
-          <p:cNvPr id="26" name="Shape 18"/>
-          <p:cNvSpPr/>
-          <p:nvPr/>
-        </p:nvSpPr>
-        <p:spPr>
-          <a:xfrm>
-            <a:off x="5669280" y="4251960"/>
-            <a:ext cx="0" cy="1600200"/>
-          </a:xfrm>
-          <a:prstGeom prst="line">
-            <a:avLst/>
-          </a:prstGeom>
-          <a:noFill/>
-          <a:ln w="6350">
-            <a:solidFill>
-              <a:srgbClr val="8891A3">
-                <a:alpha val="35000"/>
-              </a:srgbClr>
-            </a:solidFill>
-            <a:prstDash val="solid"/>
-          </a:ln>
-        </p:spPr>
-        <p:txBody>
-          <a:bodyPr/>
-          <a:lstStyle/>
-          <a:p>
-            <a:endParaRPr lang="fr-FR"/>
-          </a:p>
-        </p:txBody>
-      </p:sp>
-      <p:sp>
-        <p:nvSpPr>
-          <p:cNvPr id="27" name="Text 19"/>
-          <p:cNvSpPr/>
-          <p:nvPr/>
-        </p:nvSpPr>
-        <p:spPr>
-          <a:xfrm>
-            <a:off x="5989320" y="4343400"/>
-            <a:ext cx="4846320" cy="1371600"/>
-          </a:xfrm>
-          <a:prstGeom prst="rect">
-            <a:avLst/>
-          </a:prstGeom>
-          <a:noFill/>
-          <a:ln/>
-        </p:spPr>
-        <p:txBody>
-          <a:bodyPr wrap="square" lIns="0" tIns="0" rIns="0" bIns="0" rtlCol="0" anchor="ctr"/>
-          <a:lstStyle/>
-          <a:p>
-            <a:pPr marL="0" indent="0">
-              <a:lnSpc>
-                <a:spcPct val="130000"/>
-              </a:lnSpc>
-              <a:buNone/>
-            </a:pPr>
-            <a:r>
-              <a:rPr lang="en-US" sz="1300" dirty="0">
-                <a:solidFill>
-                  <a:srgbClr val="C9CEDA"/>
-                </a:solidFill>
-                <a:latin typeface="Calibri" pitchFamily="34" charset="0"/>
-                <a:ea typeface="Calibri" pitchFamily="34" charset="-122"/>
-                <a:cs typeface="Calibri" pitchFamily="34" charset="-120"/>
-              </a:rPr>
-              <a:t>Le prix final et la stratégie de facturation restent définis par l'opérateur partenaire, en fonction du marché et de l'offre commerciale retenue.</a:t>
-            </a:r>
-            <a:endParaRPr lang="en-US" sz="1300" dirty="0"/>
-          </a:p>
-        </p:txBody>
-      </p:sp>
-      <p:sp>
-        <p:nvSpPr>
-          <p:cNvPr id="28" name="Text 20"/>
-          <p:cNvSpPr/>
-          <p:nvPr/>
-        </p:nvSpPr>
-        <p:spPr>
-          <a:xfrm>
-            <a:off x="11368735" y="6400800"/>
-            <a:ext cx="548640" cy="292608"/>
-          </a:xfrm>
-          <a:prstGeom prst="rect">
-            <a:avLst/>
-          </a:prstGeom>
-          <a:noFill/>
-          <a:ln/>
-        </p:spPr>
-        <p:txBody>
-          <a:bodyPr wrap="square" lIns="0" tIns="0" rIns="0" bIns="0" rtlCol="0" anchor="ctr"/>
-          <a:lstStyle/>
-          <a:p>
-            <a:pPr marL="0" indent="0" algn="r">
-              <a:buNone/>
-            </a:pPr>
-            <a:r>
-              <a:rPr lang="en-US" sz="1100" dirty="0">
-                <a:solidFill>
-                  <a:srgbClr val="8891A3"/>
-                </a:solidFill>
-                <a:latin typeface="Calibri" pitchFamily="34" charset="0"/>
-                <a:ea typeface="Calibri" pitchFamily="34" charset="-122"/>
-                <a:cs typeface="Calibri" pitchFamily="34" charset="-120"/>
-              </a:rPr>
-              <a:t>22</a:t>
-            </a:r>
-            <a:endParaRPr lang="en-US" sz="1100" dirty="0"/>
-          </a:p>
-        </p:txBody>
-      </p:sp>
-    </p:spTree>
-  </p:cSld>
-  <p:clrMapOvr>
-    <a:masterClrMapping/>
-  </p:clrMapOvr>
-</p:sld>
-</file>
-
-<file path=ppt/slides/slide23.xml><?xml version="1.0" encoding="utf-8"?>
 <p:sld xmlns:a="http://schemas.openxmlformats.org/drawingml/2006/main" xmlns:r="http://schemas.openxmlformats.org/officeDocument/2006/relationships" xmlns:p="http://schemas.openxmlformats.org/presentationml/2006/main">
   <p:cSld name="Slide 20">
     <p:bg>
@@ -13724,7 +12508,7 @@
                 <a:ea typeface="Calibri" pitchFamily="34" charset="-122"/>
                 <a:cs typeface="Calibri" pitchFamily="34" charset="-120"/>
               </a:rPr>
-              <a:t>23</a:t>
+              <a:t>22</a:t>
             </a:r>
             <a:endParaRPr lang="en-US" sz="1100" dirty="0"/>
           </a:p>
@@ -13738,7 +12522,7 @@
 </p:sld>
 </file>
 
-<file path=ppt/slides/slide24.xml><?xml version="1.0" encoding="utf-8"?>
+<file path=ppt/slides/slide23.xml><?xml version="1.0" encoding="utf-8"?>
 <p:sld xmlns:a="http://schemas.openxmlformats.org/drawingml/2006/main" xmlns:r="http://schemas.openxmlformats.org/officeDocument/2006/relationships" xmlns:p="http://schemas.openxmlformats.org/presentationml/2006/main">
   <p:cSld name="Slide 21">
     <p:bg>
@@ -15501,7 +14285,7 @@
                 <a:ea typeface="Calibri" pitchFamily="34" charset="-122"/>
                 <a:cs typeface="Calibri" pitchFamily="34" charset="-120"/>
               </a:rPr>
-              <a:t>24</a:t>
+              <a:t>23</a:t>
             </a:r>
             <a:endParaRPr lang="en-US" sz="1100" dirty="0"/>
           </a:p>
@@ -15515,7 +14299,7 @@
 </p:sld>
 </file>
 
-<file path=ppt/slides/slide25.xml><?xml version="1.0" encoding="utf-8"?>
+<file path=ppt/slides/slide24.xml><?xml version="1.0" encoding="utf-8"?>
 <p:sld xmlns:a="http://schemas.openxmlformats.org/drawingml/2006/main" xmlns:r="http://schemas.openxmlformats.org/officeDocument/2006/relationships" xmlns:p="http://schemas.openxmlformats.org/presentationml/2006/main">
   <p:cSld name="Slide 22">
     <p:bg>
@@ -15877,7 +14661,7 @@
                 <a:ea typeface="Calibri" pitchFamily="34" charset="-122"/>
                 <a:cs typeface="Calibri" pitchFamily="34" charset="-120"/>
               </a:rPr>
-              <a:t>25</a:t>
+              <a:t>24</a:t>
             </a:r>
             <a:endParaRPr lang="en-US" sz="1100" dirty="0"/>
           </a:p>
@@ -15891,7 +14675,7 @@
 </p:sld>
 </file>
 
-<file path=ppt/slides/slide26.xml><?xml version="1.0" encoding="utf-8"?>
+<file path=ppt/slides/slide25.xml><?xml version="1.0" encoding="utf-8"?>
 <p:sld xmlns:a="http://schemas.openxmlformats.org/drawingml/2006/main" xmlns:r="http://schemas.openxmlformats.org/officeDocument/2006/relationships" xmlns:p="http://schemas.openxmlformats.org/presentationml/2006/main">
   <p:cSld name="Slide 23">
     <p:bg>
@@ -17787,7 +16571,7 @@
               <a:buNone/>
             </a:pPr>
             <a:r>
-              <a:rPr lang="en-US" sz="1150" dirty="0">
+              <a:rPr lang="fr-FR" sz="1150" noProof="0" dirty="0">
                 <a:solidFill>
                   <a:srgbClr val="FFFFFF"/>
                 </a:solidFill>
@@ -17795,9 +16579,9 @@
                 <a:ea typeface="Calibri" pitchFamily="34" charset="-122"/>
                 <a:cs typeface="Calibri" pitchFamily="34" charset="-120"/>
               </a:rPr>
-              <a:t>Démonstration &amp; soutenance</a:t>
-            </a:r>
-            <a:endParaRPr lang="en-US" sz="1150" dirty="0"/>
+              <a:t>Démonstration &amp; présentation</a:t>
+            </a:r>
+            <a:endParaRPr lang="fr-FR" sz="1150" noProof="0" dirty="0"/>
           </a:p>
         </p:txBody>
       </p:sp>
@@ -17873,7 +16657,7 @@
                 <a:ea typeface="Calibri" pitchFamily="34" charset="-122"/>
                 <a:cs typeface="Calibri" pitchFamily="34" charset="-120"/>
               </a:rPr>
-              <a:t>26</a:t>
+              <a:t>25</a:t>
             </a:r>
             <a:endParaRPr lang="en-US" sz="1100" dirty="0"/>
           </a:p>
@@ -17887,7 +16671,7 @@
 </p:sld>
 </file>
 
-<file path=ppt/slides/slide27.xml><?xml version="1.0" encoding="utf-8"?>
+<file path=ppt/slides/slide26.xml><?xml version="1.0" encoding="utf-8"?>
 <p:sld xmlns:a="http://schemas.openxmlformats.org/drawingml/2006/main" xmlns:r="http://schemas.openxmlformats.org/officeDocument/2006/relationships" xmlns:p="http://schemas.openxmlformats.org/presentationml/2006/main">
   <p:cSld name="Slide 24">
     <p:bg>
@@ -18174,7 +16958,7 @@
           <a:bodyPr/>
           <a:lstStyle/>
           <a:p>
-            <a:endParaRPr lang="fr-FR"/>
+            <a:endParaRPr lang="fr-FR" dirty="0"/>
           </a:p>
         </p:txBody>
       </p:sp>
@@ -18235,7 +17019,7 @@
                 <a:ea typeface="Calibri" pitchFamily="34" charset="-122"/>
                 <a:cs typeface="Calibri" pitchFamily="34" charset="-120"/>
               </a:rPr>
-              <a:t>Orange Cameroun</a:t>
+              <a:t>Orange Digital Center</a:t>
             </a:r>
             <a:endParaRPr lang="en-US" sz="1250" dirty="0"/>
           </a:p>
@@ -18373,7 +17157,7 @@
                 <a:ea typeface="Calibri" pitchFamily="34" charset="-122"/>
                 <a:cs typeface="Calibri" pitchFamily="34" charset="-120"/>
               </a:rPr>
-              <a:t>27</a:t>
+              <a:t>26</a:t>
             </a:r>
             <a:endParaRPr lang="en-US" sz="1100" dirty="0"/>
           </a:p>
@@ -18410,1547 +17194,6 @@
         </p:spPr>
       </p:pic>
     </p:spTree>
-  </p:cSld>
-  <p:clrMapOvr>
-    <a:masterClrMapping/>
-  </p:clrMapOvr>
-</p:sld>
-</file>
-
-<file path=ppt/slides/slide28.xml><?xml version="1.0" encoding="utf-8"?>
-<p:sld xmlns:a="http://schemas.openxmlformats.org/drawingml/2006/main" xmlns:r="http://schemas.openxmlformats.org/officeDocument/2006/relationships" xmlns:p="http://schemas.openxmlformats.org/presentationml/2006/main" show="0">
-  <p:cSld>
-    <p:bg>
-      <p:bgPr>
-        <a:solidFill>
-          <a:srgbClr val="1B2333"/>
-        </a:solidFill>
-        <a:effectLst/>
-      </p:bgPr>
-    </p:bg>
-    <p:spTree>
-      <p:nvGrpSpPr>
-        <p:cNvPr id="1" name="">
-          <a:extLst>
-            <a:ext uri="{FF2B5EF4-FFF2-40B4-BE49-F238E27FC236}">
-              <a16:creationId xmlns:a16="http://schemas.microsoft.com/office/drawing/2014/main" id="{65DA2C3C-0E5E-75B6-51AA-C856733A15AD}"/>
-            </a:ext>
-          </a:extLst>
-        </p:cNvPr>
-        <p:cNvGrpSpPr/>
-        <p:nvPr/>
-      </p:nvGrpSpPr>
-      <p:grpSpPr>
-        <a:xfrm>
-          <a:off x="0" y="0"/>
-          <a:ext cx="0" cy="0"/>
-          <a:chOff x="0" y="0"/>
-          <a:chExt cx="0" cy="0"/>
-        </a:xfrm>
-      </p:grpSpPr>
-      <p:pic>
-        <p:nvPicPr>
-          <p:cNvPr id="2" name="Image 0" descr="/home/claude/work/bg/bg_content.png">
-            <a:extLst>
-              <a:ext uri="{FF2B5EF4-FFF2-40B4-BE49-F238E27FC236}">
-                <a16:creationId xmlns:a16="http://schemas.microsoft.com/office/drawing/2014/main" id="{EBBE95BD-78D3-4C3E-40C6-C71A7DF484D6}"/>
-              </a:ext>
-            </a:extLst>
-          </p:cNvPr>
-          <p:cNvPicPr>
-            <a:picLocks noChangeAspect="1"/>
-          </p:cNvPicPr>
-          <p:nvPr/>
-        </p:nvPicPr>
-        <p:blipFill>
-          <a:blip r:embed="rId3"/>
-          <a:stretch>
-            <a:fillRect/>
-          </a:stretch>
-        </p:blipFill>
-        <p:spPr>
-          <a:xfrm>
-            <a:off x="0" y="0"/>
-            <a:ext cx="12191695" cy="6858000"/>
-          </a:xfrm>
-          <a:prstGeom prst="rect">
-            <a:avLst/>
-          </a:prstGeom>
-        </p:spPr>
-      </p:pic>
-      <p:sp>
-        <p:nvSpPr>
-          <p:cNvPr id="3" name="Text 0">
-            <a:extLst>
-              <a:ext uri="{FF2B5EF4-FFF2-40B4-BE49-F238E27FC236}">
-                <a16:creationId xmlns:a16="http://schemas.microsoft.com/office/drawing/2014/main" id="{EF59868C-B467-8FEF-A6F8-A6CAAF6E80AE}"/>
-              </a:ext>
-            </a:extLst>
-          </p:cNvPr>
-          <p:cNvSpPr/>
-          <p:nvPr/>
-        </p:nvSpPr>
-        <p:spPr>
-          <a:xfrm>
-            <a:off x="502920" y="384048"/>
-            <a:ext cx="9144000" cy="310896"/>
-          </a:xfrm>
-          <a:prstGeom prst="rect">
-            <a:avLst/>
-          </a:prstGeom>
-          <a:noFill/>
-          <a:ln/>
-        </p:spPr>
-        <p:txBody>
-          <a:bodyPr wrap="square" lIns="0" tIns="0" rIns="0" bIns="0" rtlCol="0" anchor="ctr"/>
-          <a:lstStyle/>
-          <a:p>
-            <a:pPr marL="0" indent="0">
-              <a:buNone/>
-            </a:pPr>
-            <a:r>
-              <a:rPr lang="en-US" sz="1300" b="1" kern="0" spc="200" dirty="0">
-                <a:solidFill>
-                  <a:srgbClr val="FF7900"/>
-                </a:solidFill>
-                <a:latin typeface="Calibri" pitchFamily="34" charset="0"/>
-                <a:ea typeface="Calibri" pitchFamily="34" charset="-122"/>
-                <a:cs typeface="Calibri" pitchFamily="34" charset="-120"/>
-              </a:rPr>
-              <a:t>PERSONAS</a:t>
-            </a:r>
-            <a:endParaRPr lang="en-US" sz="1300" dirty="0"/>
-          </a:p>
-        </p:txBody>
-      </p:sp>
-      <p:sp>
-        <p:nvSpPr>
-          <p:cNvPr id="4" name="Text 1">
-            <a:extLst>
-              <a:ext uri="{FF2B5EF4-FFF2-40B4-BE49-F238E27FC236}">
-                <a16:creationId xmlns:a16="http://schemas.microsoft.com/office/drawing/2014/main" id="{E1EA916E-929C-CFF0-BC58-A26EE2DF78FD}"/>
-              </a:ext>
-            </a:extLst>
-          </p:cNvPr>
-          <p:cNvSpPr/>
-          <p:nvPr/>
-        </p:nvSpPr>
-        <p:spPr>
-          <a:xfrm>
-            <a:off x="502920" y="658368"/>
-            <a:ext cx="10607040" cy="685800"/>
-          </a:xfrm>
-          <a:prstGeom prst="rect">
-            <a:avLst/>
-          </a:prstGeom>
-          <a:noFill/>
-          <a:ln/>
-        </p:spPr>
-        <p:txBody>
-          <a:bodyPr wrap="square" lIns="0" tIns="0" rIns="0" bIns="0" rtlCol="0" anchor="ctr"/>
-          <a:lstStyle/>
-          <a:p>
-            <a:pPr marL="0" indent="0">
-              <a:buNone/>
-            </a:pPr>
-            <a:r>
-              <a:rPr lang="en-US" sz="2800" b="1" dirty="0">
-                <a:solidFill>
-                  <a:srgbClr val="FFFFFF"/>
-                </a:solidFill>
-                <a:latin typeface="Montserrat" pitchFamily="34" charset="0"/>
-                <a:ea typeface="Montserrat" pitchFamily="34" charset="-122"/>
-                <a:cs typeface="Montserrat" pitchFamily="34" charset="-120"/>
-              </a:rPr>
-              <a:t>Trois situations réelles de fraude</a:t>
-            </a:r>
-            <a:endParaRPr lang="en-US" sz="2800" dirty="0"/>
-          </a:p>
-        </p:txBody>
-      </p:sp>
-      <p:sp>
-        <p:nvSpPr>
-          <p:cNvPr id="5" name="Shape 2">
-            <a:extLst>
-              <a:ext uri="{FF2B5EF4-FFF2-40B4-BE49-F238E27FC236}">
-                <a16:creationId xmlns:a16="http://schemas.microsoft.com/office/drawing/2014/main" id="{71FE757C-2415-81E2-9CA4-D1419B3E3818}"/>
-              </a:ext>
-            </a:extLst>
-          </p:cNvPr>
-          <p:cNvSpPr/>
-          <p:nvPr/>
-        </p:nvSpPr>
-        <p:spPr>
-          <a:xfrm>
-            <a:off x="502920" y="1508760"/>
-            <a:ext cx="3520440" cy="4709160"/>
-          </a:xfrm>
-          <a:prstGeom prst="roundRect">
-            <a:avLst>
-              <a:gd name="adj" fmla="val 2338"/>
-            </a:avLst>
-          </a:prstGeom>
-          <a:solidFill>
-            <a:srgbClr val="232C42"/>
-          </a:solidFill>
-          <a:ln/>
-        </p:spPr>
-        <p:txBody>
-          <a:bodyPr/>
-          <a:lstStyle/>
-          <a:p>
-            <a:endParaRPr lang="fr-FR" dirty="0"/>
-          </a:p>
-        </p:txBody>
-      </p:sp>
-      <p:sp>
-        <p:nvSpPr>
-          <p:cNvPr id="6" name="Shape 3">
-            <a:extLst>
-              <a:ext uri="{FF2B5EF4-FFF2-40B4-BE49-F238E27FC236}">
-                <a16:creationId xmlns:a16="http://schemas.microsoft.com/office/drawing/2014/main" id="{6C54C0CB-9F50-5C59-D728-241045B435CB}"/>
-              </a:ext>
-            </a:extLst>
-          </p:cNvPr>
-          <p:cNvSpPr/>
-          <p:nvPr/>
-        </p:nvSpPr>
-        <p:spPr>
-          <a:xfrm>
-            <a:off x="502920" y="1508760"/>
-            <a:ext cx="3520440" cy="54864"/>
-          </a:xfrm>
-          <a:prstGeom prst="rect">
-            <a:avLst/>
-          </a:prstGeom>
-          <a:solidFill>
-            <a:srgbClr val="FF7900"/>
-          </a:solidFill>
-          <a:ln/>
-        </p:spPr>
-        <p:txBody>
-          <a:bodyPr/>
-          <a:lstStyle/>
-          <a:p>
-            <a:endParaRPr lang="fr-FR" dirty="0"/>
-          </a:p>
-        </p:txBody>
-      </p:sp>
-      <p:sp>
-        <p:nvSpPr>
-          <p:cNvPr id="7" name="Shape 4">
-            <a:extLst>
-              <a:ext uri="{FF2B5EF4-FFF2-40B4-BE49-F238E27FC236}">
-                <a16:creationId xmlns:a16="http://schemas.microsoft.com/office/drawing/2014/main" id="{2C59886C-5461-BF4C-0628-37901915D080}"/>
-              </a:ext>
-            </a:extLst>
-          </p:cNvPr>
-          <p:cNvSpPr/>
-          <p:nvPr/>
-        </p:nvSpPr>
-        <p:spPr>
-          <a:xfrm>
-            <a:off x="777240" y="1783080"/>
-            <a:ext cx="640080" cy="640080"/>
-          </a:xfrm>
-          <a:prstGeom prst="ellipse">
-            <a:avLst/>
-          </a:prstGeom>
-          <a:solidFill>
-            <a:srgbClr val="FF7900">
-              <a:alpha val="85000"/>
-            </a:srgbClr>
-          </a:solidFill>
-          <a:ln/>
-        </p:spPr>
-        <p:txBody>
-          <a:bodyPr/>
-          <a:lstStyle/>
-          <a:p>
-            <a:endParaRPr lang="fr-FR" dirty="0"/>
-          </a:p>
-        </p:txBody>
-      </p:sp>
-      <p:pic>
-        <p:nvPicPr>
-          <p:cNvPr id="8" name="Image 1" descr="/home/claude/work/icons/phone_FFFFFF.png">
-            <a:extLst>
-              <a:ext uri="{FF2B5EF4-FFF2-40B4-BE49-F238E27FC236}">
-                <a16:creationId xmlns:a16="http://schemas.microsoft.com/office/drawing/2014/main" id="{EC150F46-98FE-5C8C-CB51-143134417574}"/>
-              </a:ext>
-            </a:extLst>
-          </p:cNvPr>
-          <p:cNvPicPr>
-            <a:picLocks noChangeAspect="1"/>
-          </p:cNvPicPr>
-          <p:nvPr/>
-        </p:nvPicPr>
-        <p:blipFill>
-          <a:blip r:embed="rId4"/>
-          <a:stretch>
-            <a:fillRect/>
-          </a:stretch>
-        </p:blipFill>
-        <p:spPr>
-          <a:xfrm>
-            <a:off x="866851" y="1872691"/>
-            <a:ext cx="460858" cy="460858"/>
-          </a:xfrm>
-          <a:prstGeom prst="rect">
-            <a:avLst/>
-          </a:prstGeom>
-        </p:spPr>
-      </p:pic>
-      <p:sp>
-        <p:nvSpPr>
-          <p:cNvPr id="9" name="Text 5">
-            <a:extLst>
-              <a:ext uri="{FF2B5EF4-FFF2-40B4-BE49-F238E27FC236}">
-                <a16:creationId xmlns:a16="http://schemas.microsoft.com/office/drawing/2014/main" id="{6688DF9A-90BA-1F5B-58CD-B12A01393672}"/>
-              </a:ext>
-            </a:extLst>
-          </p:cNvPr>
-          <p:cNvSpPr/>
-          <p:nvPr/>
-        </p:nvSpPr>
-        <p:spPr>
-          <a:xfrm>
-            <a:off x="1554480" y="1801368"/>
-            <a:ext cx="2240280" cy="320040"/>
-          </a:xfrm>
-          <a:prstGeom prst="rect">
-            <a:avLst/>
-          </a:prstGeom>
-          <a:noFill/>
-          <a:ln/>
-        </p:spPr>
-        <p:txBody>
-          <a:bodyPr wrap="square" lIns="0" tIns="0" rIns="0" bIns="0" rtlCol="0" anchor="ctr"/>
-          <a:lstStyle/>
-          <a:p>
-            <a:pPr marL="0" indent="0">
-              <a:buNone/>
-            </a:pPr>
-            <a:r>
-              <a:rPr lang="en-US" sz="1450" b="1" dirty="0">
-                <a:solidFill>
-                  <a:srgbClr val="FFFFFF"/>
-                </a:solidFill>
-                <a:latin typeface="Calibri" pitchFamily="34" charset="0"/>
-                <a:ea typeface="Calibri" pitchFamily="34" charset="-122"/>
-                <a:cs typeface="Calibri" pitchFamily="34" charset="-120"/>
-              </a:rPr>
-              <a:t>Ndongo Marie</a:t>
-            </a:r>
-            <a:endParaRPr lang="en-US" sz="1450" dirty="0"/>
-          </a:p>
-        </p:txBody>
-      </p:sp>
-      <p:sp>
-        <p:nvSpPr>
-          <p:cNvPr id="10" name="Text 6">
-            <a:extLst>
-              <a:ext uri="{FF2B5EF4-FFF2-40B4-BE49-F238E27FC236}">
-                <a16:creationId xmlns:a16="http://schemas.microsoft.com/office/drawing/2014/main" id="{72EFB12E-88D1-9130-C76E-0B482B13EF69}"/>
-              </a:ext>
-            </a:extLst>
-          </p:cNvPr>
-          <p:cNvSpPr/>
-          <p:nvPr/>
-        </p:nvSpPr>
-        <p:spPr>
-          <a:xfrm>
-            <a:off x="1554480" y="2103120"/>
-            <a:ext cx="2240280" cy="274320"/>
-          </a:xfrm>
-          <a:prstGeom prst="rect">
-            <a:avLst/>
-          </a:prstGeom>
-          <a:noFill/>
-          <a:ln/>
-        </p:spPr>
-        <p:txBody>
-          <a:bodyPr wrap="square" lIns="0" tIns="0" rIns="0" bIns="0" rtlCol="0" anchor="ctr"/>
-          <a:lstStyle/>
-          <a:p>
-            <a:pPr marL="0" indent="0">
-              <a:buNone/>
-            </a:pPr>
-            <a:r>
-              <a:rPr lang="en-US" sz="1100" dirty="0">
-                <a:solidFill>
-                  <a:srgbClr val="C9CEDA"/>
-                </a:solidFill>
-                <a:latin typeface="Calibri" pitchFamily="34" charset="0"/>
-                <a:ea typeface="Calibri" pitchFamily="34" charset="-122"/>
-                <a:cs typeface="Calibri" pitchFamily="34" charset="-120"/>
-              </a:rPr>
-              <a:t>52 ans · Commerçante</a:t>
-            </a:r>
-            <a:endParaRPr lang="en-US" sz="1100" dirty="0"/>
-          </a:p>
-        </p:txBody>
-      </p:sp>
-      <p:sp>
-        <p:nvSpPr>
-          <p:cNvPr id="11" name="Text 7">
-            <a:extLst>
-              <a:ext uri="{FF2B5EF4-FFF2-40B4-BE49-F238E27FC236}">
-                <a16:creationId xmlns:a16="http://schemas.microsoft.com/office/drawing/2014/main" id="{8BCDE7BA-EA5B-74A8-5CFA-6F11AC08F7FE}"/>
-              </a:ext>
-            </a:extLst>
-          </p:cNvPr>
-          <p:cNvSpPr/>
-          <p:nvPr/>
-        </p:nvSpPr>
-        <p:spPr>
-          <a:xfrm>
-            <a:off x="777240" y="2651760"/>
-            <a:ext cx="2971800" cy="256032"/>
-          </a:xfrm>
-          <a:prstGeom prst="rect">
-            <a:avLst/>
-          </a:prstGeom>
-          <a:noFill/>
-          <a:ln/>
-        </p:spPr>
-        <p:txBody>
-          <a:bodyPr wrap="square" lIns="0" tIns="0" rIns="0" bIns="0" rtlCol="0" anchor="ctr"/>
-          <a:lstStyle/>
-          <a:p>
-            <a:pPr marL="0" indent="0">
-              <a:buNone/>
-            </a:pPr>
-            <a:r>
-              <a:rPr lang="en-US" sz="1050" b="1" kern="0" spc="120" dirty="0">
-                <a:solidFill>
-                  <a:srgbClr val="FF7900"/>
-                </a:solidFill>
-                <a:latin typeface="Calibri" pitchFamily="34" charset="0"/>
-                <a:ea typeface="Calibri" pitchFamily="34" charset="-122"/>
-                <a:cs typeface="Calibri" pitchFamily="34" charset="-120"/>
-              </a:rPr>
-              <a:t>SITUATION VÉCUE</a:t>
-            </a:r>
-            <a:endParaRPr lang="en-US" sz="1050" dirty="0"/>
-          </a:p>
-        </p:txBody>
-      </p:sp>
-      <p:sp>
-        <p:nvSpPr>
-          <p:cNvPr id="12" name="Text 8">
-            <a:extLst>
-              <a:ext uri="{FF2B5EF4-FFF2-40B4-BE49-F238E27FC236}">
-                <a16:creationId xmlns:a16="http://schemas.microsoft.com/office/drawing/2014/main" id="{38982B88-F997-9146-5CF3-261DCCFD134C}"/>
-              </a:ext>
-            </a:extLst>
-          </p:cNvPr>
-          <p:cNvSpPr/>
-          <p:nvPr/>
-        </p:nvSpPr>
-        <p:spPr>
-          <a:xfrm>
-            <a:off x="777240" y="2953512"/>
-            <a:ext cx="2971800" cy="1737360"/>
-          </a:xfrm>
-          <a:prstGeom prst="rect">
-            <a:avLst/>
-          </a:prstGeom>
-          <a:noFill/>
-          <a:ln/>
-        </p:spPr>
-        <p:txBody>
-          <a:bodyPr wrap="square" lIns="0" tIns="0" rIns="0" bIns="0" rtlCol="0" anchor="ctr"/>
-          <a:lstStyle/>
-          <a:p>
-            <a:pPr marL="0" indent="0">
-              <a:lnSpc>
-                <a:spcPct val="125000"/>
-              </a:lnSpc>
-              <a:buNone/>
-            </a:pPr>
-            <a:r>
-              <a:rPr lang="en-US" sz="1200" dirty="0">
-                <a:solidFill>
-                  <a:srgbClr val="C9CEDA"/>
-                </a:solidFill>
-                <a:latin typeface="Calibri" pitchFamily="34" charset="0"/>
-                <a:ea typeface="Calibri" pitchFamily="34" charset="-122"/>
-                <a:cs typeface="Calibri" pitchFamily="34" charset="-120"/>
-              </a:rPr>
-              <a:t>Un faux « service client » l'appelle et la convainc de composer un code USSD pour « sécuriser » son compte — vidé quelques minutes plus tard.</a:t>
-            </a:r>
-            <a:endParaRPr lang="en-US" sz="1200" dirty="0"/>
-          </a:p>
-        </p:txBody>
-      </p:sp>
-      <p:sp>
-        <p:nvSpPr>
-          <p:cNvPr id="13" name="Shape 9">
-            <a:extLst>
-              <a:ext uri="{FF2B5EF4-FFF2-40B4-BE49-F238E27FC236}">
-                <a16:creationId xmlns:a16="http://schemas.microsoft.com/office/drawing/2014/main" id="{B18A04D7-AEBC-4C7E-1B0C-42E0B42A9960}"/>
-              </a:ext>
-            </a:extLst>
-          </p:cNvPr>
-          <p:cNvSpPr/>
-          <p:nvPr/>
-        </p:nvSpPr>
-        <p:spPr>
-          <a:xfrm>
-            <a:off x="777240" y="4846320"/>
-            <a:ext cx="2971800" cy="1051560"/>
-          </a:xfrm>
-          <a:prstGeom prst="roundRect">
-            <a:avLst>
-              <a:gd name="adj" fmla="val 6957"/>
-            </a:avLst>
-          </a:prstGeom>
-          <a:solidFill>
-            <a:srgbClr val="1F2739"/>
-          </a:solidFill>
-          <a:ln/>
-        </p:spPr>
-        <p:txBody>
-          <a:bodyPr/>
-          <a:lstStyle/>
-          <a:p>
-            <a:endParaRPr lang="fr-FR" dirty="0"/>
-          </a:p>
-        </p:txBody>
-      </p:sp>
-      <p:sp>
-        <p:nvSpPr>
-          <p:cNvPr id="14" name="Text 10">
-            <a:extLst>
-              <a:ext uri="{FF2B5EF4-FFF2-40B4-BE49-F238E27FC236}">
-                <a16:creationId xmlns:a16="http://schemas.microsoft.com/office/drawing/2014/main" id="{DEC3FDE0-9648-FBB0-3458-AE92DECBEAD5}"/>
-              </a:ext>
-            </a:extLst>
-          </p:cNvPr>
-          <p:cNvSpPr/>
-          <p:nvPr/>
-        </p:nvSpPr>
-        <p:spPr>
-          <a:xfrm>
-            <a:off x="914400" y="4937760"/>
-            <a:ext cx="2697480" cy="228600"/>
-          </a:xfrm>
-          <a:prstGeom prst="rect">
-            <a:avLst/>
-          </a:prstGeom>
-          <a:noFill/>
-          <a:ln/>
-        </p:spPr>
-        <p:txBody>
-          <a:bodyPr wrap="square" lIns="0" tIns="0" rIns="0" bIns="0" rtlCol="0" anchor="ctr"/>
-          <a:lstStyle/>
-          <a:p>
-            <a:pPr marL="0" indent="0">
-              <a:buNone/>
-            </a:pPr>
-            <a:r>
-              <a:rPr lang="en-US" sz="1000" b="1" kern="0" spc="120" dirty="0">
-                <a:solidFill>
-                  <a:srgbClr val="FF7900"/>
-                </a:solidFill>
-                <a:latin typeface="Calibri" pitchFamily="34" charset="0"/>
-                <a:ea typeface="Calibri" pitchFamily="34" charset="-122"/>
-                <a:cs typeface="Calibri" pitchFamily="34" charset="-120"/>
-              </a:rPr>
-              <a:t>BESOIN</a:t>
-            </a:r>
-            <a:endParaRPr lang="en-US" sz="1000" dirty="0"/>
-          </a:p>
-        </p:txBody>
-      </p:sp>
-      <p:sp>
-        <p:nvSpPr>
-          <p:cNvPr id="15" name="Text 11">
-            <a:extLst>
-              <a:ext uri="{FF2B5EF4-FFF2-40B4-BE49-F238E27FC236}">
-                <a16:creationId xmlns:a16="http://schemas.microsoft.com/office/drawing/2014/main" id="{006FF4E1-B898-636C-6CD1-70DE810DEF39}"/>
-              </a:ext>
-            </a:extLst>
-          </p:cNvPr>
-          <p:cNvSpPr/>
-          <p:nvPr/>
-        </p:nvSpPr>
-        <p:spPr>
-          <a:xfrm>
-            <a:off x="914400" y="5166360"/>
-            <a:ext cx="2697480" cy="685800"/>
-          </a:xfrm>
-          <a:prstGeom prst="rect">
-            <a:avLst/>
-          </a:prstGeom>
-          <a:noFill/>
-          <a:ln/>
-        </p:spPr>
-        <p:txBody>
-          <a:bodyPr wrap="square" lIns="0" tIns="0" rIns="0" bIns="0" rtlCol="0" anchor="ctr"/>
-          <a:lstStyle/>
-          <a:p>
-            <a:pPr marL="0" indent="0">
-              <a:lnSpc>
-                <a:spcPct val="120000"/>
-              </a:lnSpc>
-              <a:buNone/>
-            </a:pPr>
-            <a:r>
-              <a:rPr lang="en-US" sz="1200" b="1" dirty="0">
-                <a:solidFill>
-                  <a:srgbClr val="FFFFFF"/>
-                </a:solidFill>
-                <a:latin typeface="Calibri" pitchFamily="34" charset="0"/>
-                <a:ea typeface="Calibri" pitchFamily="34" charset="-122"/>
-                <a:cs typeface="Calibri" pitchFamily="34" charset="-120"/>
-              </a:rPr>
-              <a:t>Être alertée en temps réel pendant l'appel suspect.</a:t>
-            </a:r>
-            <a:endParaRPr lang="en-US" sz="1200" dirty="0"/>
-          </a:p>
-        </p:txBody>
-      </p:sp>
-      <p:sp>
-        <p:nvSpPr>
-          <p:cNvPr id="16" name="Shape 12">
-            <a:extLst>
-              <a:ext uri="{FF2B5EF4-FFF2-40B4-BE49-F238E27FC236}">
-                <a16:creationId xmlns:a16="http://schemas.microsoft.com/office/drawing/2014/main" id="{4CEB0455-7145-9A83-FD26-3597CC8C0D14}"/>
-              </a:ext>
-            </a:extLst>
-          </p:cNvPr>
-          <p:cNvSpPr/>
-          <p:nvPr/>
-        </p:nvSpPr>
-        <p:spPr>
-          <a:xfrm>
-            <a:off x="4224528" y="1508760"/>
-            <a:ext cx="3520440" cy="4709160"/>
-          </a:xfrm>
-          <a:prstGeom prst="roundRect">
-            <a:avLst>
-              <a:gd name="adj" fmla="val 2338"/>
-            </a:avLst>
-          </a:prstGeom>
-          <a:solidFill>
-            <a:srgbClr val="232C42"/>
-          </a:solidFill>
-          <a:ln/>
-        </p:spPr>
-        <p:txBody>
-          <a:bodyPr/>
-          <a:lstStyle/>
-          <a:p>
-            <a:endParaRPr lang="fr-FR" dirty="0"/>
-          </a:p>
-        </p:txBody>
-      </p:sp>
-      <p:sp>
-        <p:nvSpPr>
-          <p:cNvPr id="17" name="Shape 13">
-            <a:extLst>
-              <a:ext uri="{FF2B5EF4-FFF2-40B4-BE49-F238E27FC236}">
-                <a16:creationId xmlns:a16="http://schemas.microsoft.com/office/drawing/2014/main" id="{35962D65-4180-4B86-1BC5-87C70D7969C7}"/>
-              </a:ext>
-            </a:extLst>
-          </p:cNvPr>
-          <p:cNvSpPr/>
-          <p:nvPr/>
-        </p:nvSpPr>
-        <p:spPr>
-          <a:xfrm>
-            <a:off x="4224528" y="1508760"/>
-            <a:ext cx="3520440" cy="54864"/>
-          </a:xfrm>
-          <a:prstGeom prst="rect">
-            <a:avLst/>
-          </a:prstGeom>
-          <a:solidFill>
-            <a:srgbClr val="4D6AB1"/>
-          </a:solidFill>
-          <a:ln/>
-        </p:spPr>
-        <p:txBody>
-          <a:bodyPr/>
-          <a:lstStyle/>
-          <a:p>
-            <a:endParaRPr lang="fr-FR" dirty="0"/>
-          </a:p>
-        </p:txBody>
-      </p:sp>
-      <p:sp>
-        <p:nvSpPr>
-          <p:cNvPr id="18" name="Shape 14">
-            <a:extLst>
-              <a:ext uri="{FF2B5EF4-FFF2-40B4-BE49-F238E27FC236}">
-                <a16:creationId xmlns:a16="http://schemas.microsoft.com/office/drawing/2014/main" id="{0601873E-BE7C-30A2-869D-BE366505F5DE}"/>
-              </a:ext>
-            </a:extLst>
-          </p:cNvPr>
-          <p:cNvSpPr/>
-          <p:nvPr/>
-        </p:nvSpPr>
-        <p:spPr>
-          <a:xfrm>
-            <a:off x="4498848" y="1783080"/>
-            <a:ext cx="640080" cy="640080"/>
-          </a:xfrm>
-          <a:prstGeom prst="ellipse">
-            <a:avLst/>
-          </a:prstGeom>
-          <a:solidFill>
-            <a:srgbClr val="4D6AB1">
-              <a:alpha val="85000"/>
-            </a:srgbClr>
-          </a:solidFill>
-          <a:ln/>
-        </p:spPr>
-        <p:txBody>
-          <a:bodyPr/>
-          <a:lstStyle/>
-          <a:p>
-            <a:endParaRPr lang="fr-FR" dirty="0"/>
-          </a:p>
-        </p:txBody>
-      </p:sp>
-      <p:pic>
-        <p:nvPicPr>
-          <p:cNvPr id="19" name="Image 2" descr="/home/claude/work/icons/card_FFFFFF.png">
-            <a:extLst>
-              <a:ext uri="{FF2B5EF4-FFF2-40B4-BE49-F238E27FC236}">
-                <a16:creationId xmlns:a16="http://schemas.microsoft.com/office/drawing/2014/main" id="{BDB74E14-AAEF-D239-7F1D-D9EA088E2F40}"/>
-              </a:ext>
-            </a:extLst>
-          </p:cNvPr>
-          <p:cNvPicPr>
-            <a:picLocks noChangeAspect="1"/>
-          </p:cNvPicPr>
-          <p:nvPr/>
-        </p:nvPicPr>
-        <p:blipFill>
-          <a:blip r:embed="rId5"/>
-          <a:stretch>
-            <a:fillRect/>
-          </a:stretch>
-        </p:blipFill>
-        <p:spPr>
-          <a:xfrm>
-            <a:off x="4588459" y="1872691"/>
-            <a:ext cx="460858" cy="460858"/>
-          </a:xfrm>
-          <a:prstGeom prst="rect">
-            <a:avLst/>
-          </a:prstGeom>
-        </p:spPr>
-      </p:pic>
-      <p:sp>
-        <p:nvSpPr>
-          <p:cNvPr id="20" name="Text 15">
-            <a:extLst>
-              <a:ext uri="{FF2B5EF4-FFF2-40B4-BE49-F238E27FC236}">
-                <a16:creationId xmlns:a16="http://schemas.microsoft.com/office/drawing/2014/main" id="{DAD48C26-36E1-78A1-3109-1EF7303EDFB0}"/>
-              </a:ext>
-            </a:extLst>
-          </p:cNvPr>
-          <p:cNvSpPr/>
-          <p:nvPr/>
-        </p:nvSpPr>
-        <p:spPr>
-          <a:xfrm>
-            <a:off x="5276088" y="1801368"/>
-            <a:ext cx="2240280" cy="320040"/>
-          </a:xfrm>
-          <a:prstGeom prst="rect">
-            <a:avLst/>
-          </a:prstGeom>
-          <a:noFill/>
-          <a:ln/>
-        </p:spPr>
-        <p:txBody>
-          <a:bodyPr wrap="square" lIns="0" tIns="0" rIns="0" bIns="0" rtlCol="0" anchor="ctr"/>
-          <a:lstStyle/>
-          <a:p>
-            <a:pPr marL="0" indent="0">
-              <a:buNone/>
-            </a:pPr>
-            <a:r>
-              <a:rPr lang="en-US" sz="1450" b="1" dirty="0">
-                <a:solidFill>
-                  <a:srgbClr val="FFFFFF"/>
-                </a:solidFill>
-                <a:latin typeface="Calibri" pitchFamily="34" charset="0"/>
-                <a:ea typeface="Calibri" pitchFamily="34" charset="-122"/>
-                <a:cs typeface="Calibri" pitchFamily="34" charset="-120"/>
-              </a:rPr>
-              <a:t>Fotso Junior</a:t>
-            </a:r>
-            <a:endParaRPr lang="en-US" sz="1450" dirty="0"/>
-          </a:p>
-        </p:txBody>
-      </p:sp>
-      <p:sp>
-        <p:nvSpPr>
-          <p:cNvPr id="21" name="Text 16">
-            <a:extLst>
-              <a:ext uri="{FF2B5EF4-FFF2-40B4-BE49-F238E27FC236}">
-                <a16:creationId xmlns:a16="http://schemas.microsoft.com/office/drawing/2014/main" id="{E4404438-86B6-951C-631C-32917ED33B74}"/>
-              </a:ext>
-            </a:extLst>
-          </p:cNvPr>
-          <p:cNvSpPr/>
-          <p:nvPr/>
-        </p:nvSpPr>
-        <p:spPr>
-          <a:xfrm>
-            <a:off x="5276088" y="2103120"/>
-            <a:ext cx="2240280" cy="274320"/>
-          </a:xfrm>
-          <a:prstGeom prst="rect">
-            <a:avLst/>
-          </a:prstGeom>
-          <a:noFill/>
-          <a:ln/>
-        </p:spPr>
-        <p:txBody>
-          <a:bodyPr wrap="square" lIns="0" tIns="0" rIns="0" bIns="0" rtlCol="0" anchor="ctr"/>
-          <a:lstStyle/>
-          <a:p>
-            <a:pPr marL="0" indent="0">
-              <a:buNone/>
-            </a:pPr>
-            <a:r>
-              <a:rPr lang="en-US" sz="1100" dirty="0">
-                <a:solidFill>
-                  <a:srgbClr val="C9CEDA"/>
-                </a:solidFill>
-                <a:latin typeface="Calibri" pitchFamily="34" charset="0"/>
-                <a:ea typeface="Calibri" pitchFamily="34" charset="-122"/>
-                <a:cs typeface="Calibri" pitchFamily="34" charset="-120"/>
-              </a:rPr>
-              <a:t>27 ans · Chauffeur moto-taxi</a:t>
-            </a:r>
-            <a:endParaRPr lang="en-US" sz="1100" dirty="0"/>
-          </a:p>
-        </p:txBody>
-      </p:sp>
-      <p:sp>
-        <p:nvSpPr>
-          <p:cNvPr id="22" name="Text 17">
-            <a:extLst>
-              <a:ext uri="{FF2B5EF4-FFF2-40B4-BE49-F238E27FC236}">
-                <a16:creationId xmlns:a16="http://schemas.microsoft.com/office/drawing/2014/main" id="{0D777E23-D935-F14F-2E87-3CF04A409B87}"/>
-              </a:ext>
-            </a:extLst>
-          </p:cNvPr>
-          <p:cNvSpPr/>
-          <p:nvPr/>
-        </p:nvSpPr>
-        <p:spPr>
-          <a:xfrm>
-            <a:off x="4498848" y="2651760"/>
-            <a:ext cx="2971800" cy="256032"/>
-          </a:xfrm>
-          <a:prstGeom prst="rect">
-            <a:avLst/>
-          </a:prstGeom>
-          <a:noFill/>
-          <a:ln/>
-        </p:spPr>
-        <p:txBody>
-          <a:bodyPr wrap="square" lIns="0" tIns="0" rIns="0" bIns="0" rtlCol="0" anchor="ctr"/>
-          <a:lstStyle/>
-          <a:p>
-            <a:pPr marL="0" indent="0">
-              <a:buNone/>
-            </a:pPr>
-            <a:r>
-              <a:rPr lang="en-US" sz="1050" b="1" kern="0" spc="120" dirty="0">
-                <a:solidFill>
-                  <a:srgbClr val="4D6AB1"/>
-                </a:solidFill>
-                <a:latin typeface="Calibri" pitchFamily="34" charset="0"/>
-                <a:ea typeface="Calibri" pitchFamily="34" charset="-122"/>
-                <a:cs typeface="Calibri" pitchFamily="34" charset="-120"/>
-              </a:rPr>
-              <a:t>SITUATION VÉCUE</a:t>
-            </a:r>
-            <a:endParaRPr lang="en-US" sz="1050" dirty="0"/>
-          </a:p>
-        </p:txBody>
-      </p:sp>
-      <p:sp>
-        <p:nvSpPr>
-          <p:cNvPr id="23" name="Text 18">
-            <a:extLst>
-              <a:ext uri="{FF2B5EF4-FFF2-40B4-BE49-F238E27FC236}">
-                <a16:creationId xmlns:a16="http://schemas.microsoft.com/office/drawing/2014/main" id="{D5ECC5BA-B58A-BB29-9EC3-66ACE6732004}"/>
-              </a:ext>
-            </a:extLst>
-          </p:cNvPr>
-          <p:cNvSpPr/>
-          <p:nvPr/>
-        </p:nvSpPr>
-        <p:spPr>
-          <a:xfrm>
-            <a:off x="4498848" y="2953512"/>
-            <a:ext cx="2971800" cy="1737360"/>
-          </a:xfrm>
-          <a:prstGeom prst="rect">
-            <a:avLst/>
-          </a:prstGeom>
-          <a:noFill/>
-          <a:ln/>
-        </p:spPr>
-        <p:txBody>
-          <a:bodyPr wrap="square" lIns="0" tIns="0" rIns="0" bIns="0" rtlCol="0" anchor="ctr"/>
-          <a:lstStyle/>
-          <a:p>
-            <a:pPr marL="0" indent="0">
-              <a:lnSpc>
-                <a:spcPct val="125000"/>
-              </a:lnSpc>
-              <a:buNone/>
-            </a:pPr>
-            <a:r>
-              <a:rPr lang="en-US" sz="1200" dirty="0">
-                <a:solidFill>
-                  <a:srgbClr val="C9CEDA"/>
-                </a:solidFill>
-                <a:latin typeface="Calibri" pitchFamily="34" charset="0"/>
-                <a:ea typeface="Calibri" pitchFamily="34" charset="-122"/>
-                <a:cs typeface="Calibri" pitchFamily="34" charset="-120"/>
-              </a:rPr>
-              <a:t>Un « agent partenaire » lui propose une offre limitée dans le temps. Pressé, il valide un transfert vers un numéro inconnu.</a:t>
-            </a:r>
-            <a:endParaRPr lang="en-US" sz="1200" dirty="0"/>
-          </a:p>
-        </p:txBody>
-      </p:sp>
-      <p:sp>
-        <p:nvSpPr>
-          <p:cNvPr id="24" name="Shape 19">
-            <a:extLst>
-              <a:ext uri="{FF2B5EF4-FFF2-40B4-BE49-F238E27FC236}">
-                <a16:creationId xmlns:a16="http://schemas.microsoft.com/office/drawing/2014/main" id="{EF0FE045-2C95-5BA8-5941-0DF1246064C1}"/>
-              </a:ext>
-            </a:extLst>
-          </p:cNvPr>
-          <p:cNvSpPr/>
-          <p:nvPr/>
-        </p:nvSpPr>
-        <p:spPr>
-          <a:xfrm>
-            <a:off x="4498848" y="4846320"/>
-            <a:ext cx="2971800" cy="1051560"/>
-          </a:xfrm>
-          <a:prstGeom prst="roundRect">
-            <a:avLst>
-              <a:gd name="adj" fmla="val 6957"/>
-            </a:avLst>
-          </a:prstGeom>
-          <a:solidFill>
-            <a:srgbClr val="1F2739"/>
-          </a:solidFill>
-          <a:ln/>
-        </p:spPr>
-        <p:txBody>
-          <a:bodyPr/>
-          <a:lstStyle/>
-          <a:p>
-            <a:endParaRPr lang="fr-FR" dirty="0"/>
-          </a:p>
-        </p:txBody>
-      </p:sp>
-      <p:sp>
-        <p:nvSpPr>
-          <p:cNvPr id="25" name="Text 20">
-            <a:extLst>
-              <a:ext uri="{FF2B5EF4-FFF2-40B4-BE49-F238E27FC236}">
-                <a16:creationId xmlns:a16="http://schemas.microsoft.com/office/drawing/2014/main" id="{813965B7-818E-5966-677D-AD8AD22C8E9A}"/>
-              </a:ext>
-            </a:extLst>
-          </p:cNvPr>
-          <p:cNvSpPr/>
-          <p:nvPr/>
-        </p:nvSpPr>
-        <p:spPr>
-          <a:xfrm>
-            <a:off x="4636008" y="4937760"/>
-            <a:ext cx="2697480" cy="228600"/>
-          </a:xfrm>
-          <a:prstGeom prst="rect">
-            <a:avLst/>
-          </a:prstGeom>
-          <a:noFill/>
-          <a:ln/>
-        </p:spPr>
-        <p:txBody>
-          <a:bodyPr wrap="square" lIns="0" tIns="0" rIns="0" bIns="0" rtlCol="0" anchor="ctr"/>
-          <a:lstStyle/>
-          <a:p>
-            <a:pPr marL="0" indent="0">
-              <a:buNone/>
-            </a:pPr>
-            <a:r>
-              <a:rPr lang="en-US" sz="1000" b="1" kern="0" spc="120" dirty="0">
-                <a:solidFill>
-                  <a:srgbClr val="4D6AB1"/>
-                </a:solidFill>
-                <a:latin typeface="Calibri" pitchFamily="34" charset="0"/>
-                <a:ea typeface="Calibri" pitchFamily="34" charset="-122"/>
-                <a:cs typeface="Calibri" pitchFamily="34" charset="-120"/>
-              </a:rPr>
-              <a:t>BESOIN</a:t>
-            </a:r>
-            <a:endParaRPr lang="en-US" sz="1000" dirty="0"/>
-          </a:p>
-        </p:txBody>
-      </p:sp>
-      <p:sp>
-        <p:nvSpPr>
-          <p:cNvPr id="26" name="Text 21">
-            <a:extLst>
-              <a:ext uri="{FF2B5EF4-FFF2-40B4-BE49-F238E27FC236}">
-                <a16:creationId xmlns:a16="http://schemas.microsoft.com/office/drawing/2014/main" id="{9A442351-43D5-EC36-69C3-B53277FDDD6C}"/>
-              </a:ext>
-            </a:extLst>
-          </p:cNvPr>
-          <p:cNvSpPr/>
-          <p:nvPr/>
-        </p:nvSpPr>
-        <p:spPr>
-          <a:xfrm>
-            <a:off x="4636008" y="5166360"/>
-            <a:ext cx="2697480" cy="685800"/>
-          </a:xfrm>
-          <a:prstGeom prst="rect">
-            <a:avLst/>
-          </a:prstGeom>
-          <a:noFill/>
-          <a:ln/>
-        </p:spPr>
-        <p:txBody>
-          <a:bodyPr wrap="square" lIns="0" tIns="0" rIns="0" bIns="0" rtlCol="0" anchor="ctr"/>
-          <a:lstStyle/>
-          <a:p>
-            <a:pPr marL="0" indent="0">
-              <a:lnSpc>
-                <a:spcPct val="120000"/>
-              </a:lnSpc>
-              <a:buNone/>
-            </a:pPr>
-            <a:r>
-              <a:rPr lang="en-US" sz="1200" b="1" dirty="0">
-                <a:solidFill>
-                  <a:srgbClr val="FFFFFF"/>
-                </a:solidFill>
-                <a:latin typeface="Calibri" pitchFamily="34" charset="0"/>
-                <a:ea typeface="Calibri" pitchFamily="34" charset="-122"/>
-                <a:cs typeface="Calibri" pitchFamily="34" charset="-120"/>
-              </a:rPr>
-              <a:t>Vérifier un numéro avant d'agir, et le signaler.</a:t>
-            </a:r>
-            <a:endParaRPr lang="en-US" sz="1200" dirty="0"/>
-          </a:p>
-        </p:txBody>
-      </p:sp>
-      <p:sp>
-        <p:nvSpPr>
-          <p:cNvPr id="27" name="Shape 22">
-            <a:extLst>
-              <a:ext uri="{FF2B5EF4-FFF2-40B4-BE49-F238E27FC236}">
-                <a16:creationId xmlns:a16="http://schemas.microsoft.com/office/drawing/2014/main" id="{BA0EF212-0683-A156-7F16-A1C8D97E50DF}"/>
-              </a:ext>
-            </a:extLst>
-          </p:cNvPr>
-          <p:cNvSpPr/>
-          <p:nvPr/>
-        </p:nvSpPr>
-        <p:spPr>
-          <a:xfrm>
-            <a:off x="7946136" y="1508760"/>
-            <a:ext cx="3520440" cy="4709160"/>
-          </a:xfrm>
-          <a:prstGeom prst="roundRect">
-            <a:avLst>
-              <a:gd name="adj" fmla="val 2338"/>
-            </a:avLst>
-          </a:prstGeom>
-          <a:solidFill>
-            <a:srgbClr val="232C42"/>
-          </a:solidFill>
-          <a:ln/>
-        </p:spPr>
-        <p:txBody>
-          <a:bodyPr/>
-          <a:lstStyle/>
-          <a:p>
-            <a:endParaRPr lang="fr-FR" dirty="0"/>
-          </a:p>
-        </p:txBody>
-      </p:sp>
-      <p:sp>
-        <p:nvSpPr>
-          <p:cNvPr id="28" name="Shape 23">
-            <a:extLst>
-              <a:ext uri="{FF2B5EF4-FFF2-40B4-BE49-F238E27FC236}">
-                <a16:creationId xmlns:a16="http://schemas.microsoft.com/office/drawing/2014/main" id="{C831B904-DD60-CFED-9087-AB3DD996930A}"/>
-              </a:ext>
-            </a:extLst>
-          </p:cNvPr>
-          <p:cNvSpPr/>
-          <p:nvPr/>
-        </p:nvSpPr>
-        <p:spPr>
-          <a:xfrm>
-            <a:off x="7946136" y="1508760"/>
-            <a:ext cx="3520440" cy="54864"/>
-          </a:xfrm>
-          <a:prstGeom prst="rect">
-            <a:avLst/>
-          </a:prstGeom>
-          <a:solidFill>
-            <a:srgbClr val="F6A020"/>
-          </a:solidFill>
-          <a:ln/>
-        </p:spPr>
-        <p:txBody>
-          <a:bodyPr/>
-          <a:lstStyle/>
-          <a:p>
-            <a:endParaRPr lang="fr-FR" dirty="0"/>
-          </a:p>
-        </p:txBody>
-      </p:sp>
-      <p:sp>
-        <p:nvSpPr>
-          <p:cNvPr id="29" name="Shape 24">
-            <a:extLst>
-              <a:ext uri="{FF2B5EF4-FFF2-40B4-BE49-F238E27FC236}">
-                <a16:creationId xmlns:a16="http://schemas.microsoft.com/office/drawing/2014/main" id="{6614EC4A-CF56-5453-471D-7189512BF2B1}"/>
-              </a:ext>
-            </a:extLst>
-          </p:cNvPr>
-          <p:cNvSpPr/>
-          <p:nvPr/>
-        </p:nvSpPr>
-        <p:spPr>
-          <a:xfrm>
-            <a:off x="8220456" y="1783080"/>
-            <a:ext cx="640080" cy="640080"/>
-          </a:xfrm>
-          <a:prstGeom prst="ellipse">
-            <a:avLst/>
-          </a:prstGeom>
-          <a:solidFill>
-            <a:srgbClr val="F6A020">
-              <a:alpha val="85000"/>
-            </a:srgbClr>
-          </a:solidFill>
-          <a:ln/>
-        </p:spPr>
-        <p:txBody>
-          <a:bodyPr/>
-          <a:lstStyle/>
-          <a:p>
-            <a:endParaRPr lang="fr-FR" dirty="0"/>
-          </a:p>
-        </p:txBody>
-      </p:sp>
-      <p:pic>
-        <p:nvPicPr>
-          <p:cNvPr id="30" name="Image 3" descr="/home/claude/work/icons/message_FFFFFF.png">
-            <a:extLst>
-              <a:ext uri="{FF2B5EF4-FFF2-40B4-BE49-F238E27FC236}">
-                <a16:creationId xmlns:a16="http://schemas.microsoft.com/office/drawing/2014/main" id="{07D1ADBD-8A1F-9658-C2D8-DDC6CB408AB8}"/>
-              </a:ext>
-            </a:extLst>
-          </p:cNvPr>
-          <p:cNvPicPr>
-            <a:picLocks noChangeAspect="1"/>
-          </p:cNvPicPr>
-          <p:nvPr/>
-        </p:nvPicPr>
-        <p:blipFill>
-          <a:blip r:embed="rId6"/>
-          <a:stretch>
-            <a:fillRect/>
-          </a:stretch>
-        </p:blipFill>
-        <p:spPr>
-          <a:xfrm>
-            <a:off x="8310067" y="1872691"/>
-            <a:ext cx="460858" cy="460858"/>
-          </a:xfrm>
-          <a:prstGeom prst="rect">
-            <a:avLst/>
-          </a:prstGeom>
-        </p:spPr>
-      </p:pic>
-      <p:sp>
-        <p:nvSpPr>
-          <p:cNvPr id="31" name="Text 25">
-            <a:extLst>
-              <a:ext uri="{FF2B5EF4-FFF2-40B4-BE49-F238E27FC236}">
-                <a16:creationId xmlns:a16="http://schemas.microsoft.com/office/drawing/2014/main" id="{312CE2FE-4984-C35A-A9FD-07EC48DA4852}"/>
-              </a:ext>
-            </a:extLst>
-          </p:cNvPr>
-          <p:cNvSpPr/>
-          <p:nvPr/>
-        </p:nvSpPr>
-        <p:spPr>
-          <a:xfrm>
-            <a:off x="8997696" y="1801368"/>
-            <a:ext cx="2240280" cy="320040"/>
-          </a:xfrm>
-          <a:prstGeom prst="rect">
-            <a:avLst/>
-          </a:prstGeom>
-          <a:noFill/>
-          <a:ln/>
-        </p:spPr>
-        <p:txBody>
-          <a:bodyPr wrap="square" lIns="0" tIns="0" rIns="0" bIns="0" rtlCol="0" anchor="ctr"/>
-          <a:lstStyle/>
-          <a:p>
-            <a:pPr marL="0" indent="0">
-              <a:buNone/>
-            </a:pPr>
-            <a:r>
-              <a:rPr lang="en-US" sz="1450" b="1" dirty="0">
-                <a:solidFill>
-                  <a:srgbClr val="FFFFFF"/>
-                </a:solidFill>
-                <a:latin typeface="Calibri" pitchFamily="34" charset="0"/>
-                <a:ea typeface="Calibri" pitchFamily="34" charset="-122"/>
-                <a:cs typeface="Calibri" pitchFamily="34" charset="-120"/>
-              </a:rPr>
-              <a:t>Ateba Sandrine</a:t>
-            </a:r>
-            <a:endParaRPr lang="en-US" sz="1450" dirty="0"/>
-          </a:p>
-        </p:txBody>
-      </p:sp>
-      <p:sp>
-        <p:nvSpPr>
-          <p:cNvPr id="32" name="Text 26">
-            <a:extLst>
-              <a:ext uri="{FF2B5EF4-FFF2-40B4-BE49-F238E27FC236}">
-                <a16:creationId xmlns:a16="http://schemas.microsoft.com/office/drawing/2014/main" id="{567F5FB6-FFCB-507A-C86C-A06C62599CCA}"/>
-              </a:ext>
-            </a:extLst>
-          </p:cNvPr>
-          <p:cNvSpPr/>
-          <p:nvPr/>
-        </p:nvSpPr>
-        <p:spPr>
-          <a:xfrm>
-            <a:off x="8997696" y="2103120"/>
-            <a:ext cx="2240280" cy="274320"/>
-          </a:xfrm>
-          <a:prstGeom prst="rect">
-            <a:avLst/>
-          </a:prstGeom>
-          <a:noFill/>
-          <a:ln/>
-        </p:spPr>
-        <p:txBody>
-          <a:bodyPr wrap="square" lIns="0" tIns="0" rIns="0" bIns="0" rtlCol="0" anchor="ctr"/>
-          <a:lstStyle/>
-          <a:p>
-            <a:pPr marL="0" indent="0">
-              <a:buNone/>
-            </a:pPr>
-            <a:r>
-              <a:rPr lang="en-US" sz="1100" dirty="0">
-                <a:solidFill>
-                  <a:srgbClr val="C9CEDA"/>
-                </a:solidFill>
-                <a:latin typeface="Calibri" pitchFamily="34" charset="0"/>
-                <a:ea typeface="Calibri" pitchFamily="34" charset="-122"/>
-                <a:cs typeface="Calibri" pitchFamily="34" charset="-120"/>
-              </a:rPr>
-              <a:t>34 ans · Enseignante</a:t>
-            </a:r>
-            <a:endParaRPr lang="en-US" sz="1100" dirty="0"/>
-          </a:p>
-        </p:txBody>
-      </p:sp>
-      <p:sp>
-        <p:nvSpPr>
-          <p:cNvPr id="33" name="Text 27">
-            <a:extLst>
-              <a:ext uri="{FF2B5EF4-FFF2-40B4-BE49-F238E27FC236}">
-                <a16:creationId xmlns:a16="http://schemas.microsoft.com/office/drawing/2014/main" id="{49BCE3FB-6CA7-4815-2063-93FF639D677E}"/>
-              </a:ext>
-            </a:extLst>
-          </p:cNvPr>
-          <p:cNvSpPr/>
-          <p:nvPr/>
-        </p:nvSpPr>
-        <p:spPr>
-          <a:xfrm>
-            <a:off x="8220456" y="2651760"/>
-            <a:ext cx="2971800" cy="256032"/>
-          </a:xfrm>
-          <a:prstGeom prst="rect">
-            <a:avLst/>
-          </a:prstGeom>
-          <a:noFill/>
-          <a:ln/>
-        </p:spPr>
-        <p:txBody>
-          <a:bodyPr wrap="square" lIns="0" tIns="0" rIns="0" bIns="0" rtlCol="0" anchor="ctr"/>
-          <a:lstStyle/>
-          <a:p>
-            <a:pPr marL="0" indent="0">
-              <a:buNone/>
-            </a:pPr>
-            <a:r>
-              <a:rPr lang="en-US" sz="1050" b="1" kern="0" spc="120" dirty="0">
-                <a:solidFill>
-                  <a:srgbClr val="F6A020"/>
-                </a:solidFill>
-                <a:latin typeface="Calibri" pitchFamily="34" charset="0"/>
-                <a:ea typeface="Calibri" pitchFamily="34" charset="-122"/>
-                <a:cs typeface="Calibri" pitchFamily="34" charset="-120"/>
-              </a:rPr>
-              <a:t>SITUATION VÉCUE</a:t>
-            </a:r>
-            <a:endParaRPr lang="en-US" sz="1050" dirty="0"/>
-          </a:p>
-        </p:txBody>
-      </p:sp>
-      <p:sp>
-        <p:nvSpPr>
-          <p:cNvPr id="34" name="Text 28">
-            <a:extLst>
-              <a:ext uri="{FF2B5EF4-FFF2-40B4-BE49-F238E27FC236}">
-                <a16:creationId xmlns:a16="http://schemas.microsoft.com/office/drawing/2014/main" id="{E1CE7DF9-AF42-0A58-5DE5-14A07234D403}"/>
-              </a:ext>
-            </a:extLst>
-          </p:cNvPr>
-          <p:cNvSpPr/>
-          <p:nvPr/>
-        </p:nvSpPr>
-        <p:spPr>
-          <a:xfrm>
-            <a:off x="8220456" y="2953512"/>
-            <a:ext cx="2971800" cy="1737360"/>
-          </a:xfrm>
-          <a:prstGeom prst="rect">
-            <a:avLst/>
-          </a:prstGeom>
-          <a:noFill/>
-          <a:ln/>
-        </p:spPr>
-        <p:txBody>
-          <a:bodyPr wrap="square" lIns="0" tIns="0" rIns="0" bIns="0" rtlCol="0" anchor="ctr"/>
-          <a:lstStyle/>
-          <a:p>
-            <a:pPr marL="0" indent="0">
-              <a:lnSpc>
-                <a:spcPct val="125000"/>
-              </a:lnSpc>
-              <a:buNone/>
-            </a:pPr>
-            <a:r>
-              <a:rPr lang="en-US" sz="1200" dirty="0">
-                <a:solidFill>
-                  <a:srgbClr val="C9CEDA"/>
-                </a:solidFill>
-                <a:latin typeface="Calibri" pitchFamily="34" charset="0"/>
-                <a:ea typeface="Calibri" pitchFamily="34" charset="-122"/>
-                <a:cs typeface="Calibri" pitchFamily="34" charset="-120"/>
-              </a:rPr>
-              <a:t>Le compte WhatsApp d'un proche est piraté. Le fraudeur, se faisant passer pour lui, lui demande un dépannage urgent.</a:t>
-            </a:r>
-            <a:endParaRPr lang="en-US" sz="1200" dirty="0"/>
-          </a:p>
-        </p:txBody>
-      </p:sp>
-      <p:sp>
-        <p:nvSpPr>
-          <p:cNvPr id="35" name="Shape 29">
-            <a:extLst>
-              <a:ext uri="{FF2B5EF4-FFF2-40B4-BE49-F238E27FC236}">
-                <a16:creationId xmlns:a16="http://schemas.microsoft.com/office/drawing/2014/main" id="{4378AC79-91F2-8EFC-A15F-9B9F034A74B9}"/>
-              </a:ext>
-            </a:extLst>
-          </p:cNvPr>
-          <p:cNvSpPr/>
-          <p:nvPr/>
-        </p:nvSpPr>
-        <p:spPr>
-          <a:xfrm>
-            <a:off x="8220456" y="4846320"/>
-            <a:ext cx="2971800" cy="1051560"/>
-          </a:xfrm>
-          <a:prstGeom prst="roundRect">
-            <a:avLst>
-              <a:gd name="adj" fmla="val 6957"/>
-            </a:avLst>
-          </a:prstGeom>
-          <a:solidFill>
-            <a:srgbClr val="1F2739"/>
-          </a:solidFill>
-          <a:ln/>
-        </p:spPr>
-        <p:txBody>
-          <a:bodyPr/>
-          <a:lstStyle/>
-          <a:p>
-            <a:endParaRPr lang="fr-FR" dirty="0"/>
-          </a:p>
-        </p:txBody>
-      </p:sp>
-      <p:sp>
-        <p:nvSpPr>
-          <p:cNvPr id="36" name="Text 30">
-            <a:extLst>
-              <a:ext uri="{FF2B5EF4-FFF2-40B4-BE49-F238E27FC236}">
-                <a16:creationId xmlns:a16="http://schemas.microsoft.com/office/drawing/2014/main" id="{59060D81-19BF-DBFC-3C12-E681EA41E2D1}"/>
-              </a:ext>
-            </a:extLst>
-          </p:cNvPr>
-          <p:cNvSpPr/>
-          <p:nvPr/>
-        </p:nvSpPr>
-        <p:spPr>
-          <a:xfrm>
-            <a:off x="8357616" y="4937760"/>
-            <a:ext cx="2697480" cy="228600"/>
-          </a:xfrm>
-          <a:prstGeom prst="rect">
-            <a:avLst/>
-          </a:prstGeom>
-          <a:noFill/>
-          <a:ln/>
-        </p:spPr>
-        <p:txBody>
-          <a:bodyPr wrap="square" lIns="0" tIns="0" rIns="0" bIns="0" rtlCol="0" anchor="ctr"/>
-          <a:lstStyle/>
-          <a:p>
-            <a:pPr marL="0" indent="0">
-              <a:buNone/>
-            </a:pPr>
-            <a:r>
-              <a:rPr lang="en-US" sz="1000" b="1" kern="0" spc="120" dirty="0">
-                <a:solidFill>
-                  <a:srgbClr val="F6A020"/>
-                </a:solidFill>
-                <a:latin typeface="Calibri" pitchFamily="34" charset="0"/>
-                <a:ea typeface="Calibri" pitchFamily="34" charset="-122"/>
-                <a:cs typeface="Calibri" pitchFamily="34" charset="-120"/>
-              </a:rPr>
-              <a:t>BESOIN</a:t>
-            </a:r>
-            <a:endParaRPr lang="en-US" sz="1000" dirty="0"/>
-          </a:p>
-        </p:txBody>
-      </p:sp>
-      <p:sp>
-        <p:nvSpPr>
-          <p:cNvPr id="37" name="Text 31">
-            <a:extLst>
-              <a:ext uri="{FF2B5EF4-FFF2-40B4-BE49-F238E27FC236}">
-                <a16:creationId xmlns:a16="http://schemas.microsoft.com/office/drawing/2014/main" id="{36D57E6D-BEE8-90F8-3070-A6D03162AAEB}"/>
-              </a:ext>
-            </a:extLst>
-          </p:cNvPr>
-          <p:cNvSpPr/>
-          <p:nvPr/>
-        </p:nvSpPr>
-        <p:spPr>
-          <a:xfrm>
-            <a:off x="8357616" y="5166360"/>
-            <a:ext cx="2697480" cy="685800"/>
-          </a:xfrm>
-          <a:prstGeom prst="rect">
-            <a:avLst/>
-          </a:prstGeom>
-          <a:noFill/>
-          <a:ln/>
-        </p:spPr>
-        <p:txBody>
-          <a:bodyPr wrap="square" lIns="0" tIns="0" rIns="0" bIns="0" rtlCol="0" anchor="ctr"/>
-          <a:lstStyle/>
-          <a:p>
-            <a:pPr marL="0" indent="0">
-              <a:lnSpc>
-                <a:spcPct val="120000"/>
-              </a:lnSpc>
-              <a:buNone/>
-            </a:pPr>
-            <a:r>
-              <a:rPr lang="en-US" sz="1200" b="1" dirty="0">
-                <a:solidFill>
-                  <a:srgbClr val="FFFFFF"/>
-                </a:solidFill>
-                <a:latin typeface="Calibri" pitchFamily="34" charset="0"/>
-                <a:ea typeface="Calibri" pitchFamily="34" charset="-122"/>
-                <a:cs typeface="Calibri" pitchFamily="34" charset="-120"/>
-              </a:rPr>
-              <a:t>Être protégée aussi sur WhatsApp, et alerter ses contacts.</a:t>
-            </a:r>
-            <a:endParaRPr lang="en-US" sz="1200" dirty="0"/>
-          </a:p>
-        </p:txBody>
-      </p:sp>
-      <p:sp>
-        <p:nvSpPr>
-          <p:cNvPr id="38" name="Text 32">
-            <a:extLst>
-              <a:ext uri="{FF2B5EF4-FFF2-40B4-BE49-F238E27FC236}">
-                <a16:creationId xmlns:a16="http://schemas.microsoft.com/office/drawing/2014/main" id="{8F93A2CA-0F3F-6138-7AEF-12B1B1B3B819}"/>
-              </a:ext>
-            </a:extLst>
-          </p:cNvPr>
-          <p:cNvSpPr/>
-          <p:nvPr/>
-        </p:nvSpPr>
-        <p:spPr>
-          <a:xfrm>
-            <a:off x="11368735" y="6400800"/>
-            <a:ext cx="548640" cy="292608"/>
-          </a:xfrm>
-          <a:prstGeom prst="rect">
-            <a:avLst/>
-          </a:prstGeom>
-          <a:noFill/>
-          <a:ln/>
-        </p:spPr>
-        <p:txBody>
-          <a:bodyPr wrap="square" lIns="0" tIns="0" rIns="0" bIns="0" rtlCol="0" anchor="ctr"/>
-          <a:lstStyle/>
-          <a:p>
-            <a:pPr marL="0" indent="0" algn="r">
-              <a:buNone/>
-            </a:pPr>
-            <a:r>
-              <a:rPr lang="en-US" sz="1100" dirty="0">
-                <a:solidFill>
-                  <a:srgbClr val="8891A3"/>
-                </a:solidFill>
-                <a:latin typeface="Calibri" pitchFamily="34" charset="0"/>
-                <a:ea typeface="Calibri" pitchFamily="34" charset="-122"/>
-                <a:cs typeface="Calibri" pitchFamily="34" charset="-120"/>
-              </a:rPr>
-              <a:t>13</a:t>
-            </a:r>
-            <a:endParaRPr lang="en-US" sz="1100" dirty="0"/>
-          </a:p>
-        </p:txBody>
-      </p:sp>
-    </p:spTree>
-    <p:extLst>
-      <p:ext uri="{BB962C8B-B14F-4D97-AF65-F5344CB8AC3E}">
-        <p14:creationId xmlns:p14="http://schemas.microsoft.com/office/powerpoint/2010/main" val="893684274"/>
-      </p:ext>
-    </p:extLst>
   </p:cSld>
   <p:clrMapOvr>
     <a:masterClrMapping/>
@@ -21928,7 +19171,7 @@
                 <a:ea typeface="Calibri" pitchFamily="34" charset="-122"/>
                 <a:cs typeface="Calibri" pitchFamily="34" charset="-120"/>
               </a:rPr>
-              <a:t>Un projet porté avec Orange Cameroun, dans le cadre de l'Orange Summer Challenge.</a:t>
+              <a:t>Un projet porté avec Orange Digital Center, dans le cadre de l'Orange Summer Challenge.</a:t>
             </a:r>
             <a:endParaRPr lang="en-US" sz="1500" dirty="0"/>
           </a:p>
@@ -22185,7 +19428,7 @@
               <a:buNone/>
             </a:pPr>
             <a:r>
-              <a:rPr lang="en-US" sz="2800" b="1" dirty="0">
+              <a:rPr lang="fr-FR" sz="2800" b="1" noProof="0" dirty="0">
                 <a:solidFill>
                   <a:srgbClr val="FFFFFF"/>
                 </a:solidFill>
@@ -22193,9 +19436,9 @@
                 <a:ea typeface="Montserrat" pitchFamily="34" charset="-122"/>
                 <a:cs typeface="Montserrat" pitchFamily="34" charset="-120"/>
               </a:rPr>
-              <a:t>Un projet porté avec Orange Cameroun</a:t>
-            </a:r>
-            <a:endParaRPr lang="en-US" sz="2800" dirty="0"/>
+              <a:t>Un projet porté avec Orange Digital Center</a:t>
+            </a:r>
+            <a:endParaRPr lang="fr-FR" sz="2800" noProof="0" dirty="0"/>
           </a:p>
         </p:txBody>
       </p:sp>
@@ -22353,7 +19596,7 @@
                 <a:ea typeface="Montserrat" pitchFamily="34" charset="-122"/>
                 <a:cs typeface="Montserrat" pitchFamily="34" charset="-120"/>
               </a:rPr>
-              <a:t>Orange Cameroun</a:t>
+              <a:t>Orange Digital Center</a:t>
             </a:r>
             <a:endParaRPr lang="en-US" sz="1800" dirty="0"/>
           </a:p>
@@ -24705,7 +21948,7 @@
               <a:buNone/>
             </a:pPr>
             <a:r>
-              <a:rPr lang="en-US" sz="1100" b="1" kern="0" spc="120" dirty="0">
+              <a:rPr lang="fr-FR" sz="1100" b="1" kern="0" spc="120" noProof="0" dirty="0">
                 <a:solidFill>
                   <a:srgbClr val="FF7900"/>
                 </a:solidFill>
@@ -24713,9 +21956,9 @@
                 <a:ea typeface="Calibri" pitchFamily="34" charset="-122"/>
                 <a:cs typeface="Calibri" pitchFamily="34" charset="-120"/>
               </a:rPr>
-              <a:t>ORIGINE DE LA FRAUDE — MTN MOBILE MONEY</a:t>
-            </a:r>
-            <a:endParaRPr lang="en-US" sz="1100" dirty="0"/>
+              <a:t>ORIGINE DE LA FRAUDE — MOBILE MONEY</a:t>
+            </a:r>
+            <a:endParaRPr lang="fr-FR" sz="1100" noProof="0" dirty="0"/>
           </a:p>
         </p:txBody>
       </p:sp>

--- a/cadrage/KWISMO_Presentation.pptx
+++ b/cadrage/KWISMO_Presentation.pptx
@@ -5,7 +5,7 @@
     <p:sldMasterId id="2147483648" r:id="rId1"/>
   </p:sldMasterIdLst>
   <p:notesMasterIdLst>
-    <p:notesMasterId r:id="rId28"/>
+    <p:notesMasterId r:id="rId27"/>
   </p:notesMasterIdLst>
   <p:sldIdLst>
     <p:sldId id="256" r:id="rId2"/>
@@ -21,19 +21,18 @@
     <p:sldId id="266" r:id="rId12"/>
     <p:sldId id="267" r:id="rId13"/>
     <p:sldId id="268" r:id="rId14"/>
-    <p:sldId id="283" r:id="rId15"/>
-    <p:sldId id="282" r:id="rId16"/>
-    <p:sldId id="281" r:id="rId17"/>
-    <p:sldId id="269" r:id="rId18"/>
-    <p:sldId id="270" r:id="rId19"/>
-    <p:sldId id="271" r:id="rId20"/>
-    <p:sldId id="272" r:id="rId21"/>
-    <p:sldId id="273" r:id="rId22"/>
-    <p:sldId id="275" r:id="rId23"/>
-    <p:sldId id="276" r:id="rId24"/>
-    <p:sldId id="277" r:id="rId25"/>
-    <p:sldId id="278" r:id="rId26"/>
-    <p:sldId id="279" r:id="rId27"/>
+    <p:sldId id="282" r:id="rId15"/>
+    <p:sldId id="281" r:id="rId16"/>
+    <p:sldId id="269" r:id="rId17"/>
+    <p:sldId id="270" r:id="rId18"/>
+    <p:sldId id="271" r:id="rId19"/>
+    <p:sldId id="272" r:id="rId20"/>
+    <p:sldId id="273" r:id="rId21"/>
+    <p:sldId id="275" r:id="rId22"/>
+    <p:sldId id="276" r:id="rId23"/>
+    <p:sldId id="277" r:id="rId24"/>
+    <p:sldId id="278" r:id="rId25"/>
+    <p:sldId id="279" r:id="rId26"/>
   </p:sldIdLst>
   <p:sldSz cx="12192000" cy="6858000"/>
   <p:notesSz cx="6858000" cy="12192000"/>
@@ -690,114 +689,6 @@
         <p:cNvPr id="1" name="">
           <a:extLst>
             <a:ext uri="{FF2B5EF4-FFF2-40B4-BE49-F238E27FC236}">
-              <a16:creationId xmlns:a16="http://schemas.microsoft.com/office/drawing/2014/main" id="{ACC93441-4A50-FC18-B7CD-559B9FE846CA}"/>
-            </a:ext>
-          </a:extLst>
-        </p:cNvPr>
-        <p:cNvGrpSpPr/>
-        <p:nvPr/>
-      </p:nvGrpSpPr>
-      <p:grpSpPr>
-        <a:xfrm>
-          <a:off x="0" y="0"/>
-          <a:ext cx="0" cy="0"/>
-          <a:chOff x="0" y="0"/>
-          <a:chExt cx="0" cy="0"/>
-        </a:xfrm>
-      </p:grpSpPr>
-      <p:sp>
-        <p:nvSpPr>
-          <p:cNvPr id="2" name="Slide Image Placeholder 1">
-            <a:extLst>
-              <a:ext uri="{FF2B5EF4-FFF2-40B4-BE49-F238E27FC236}">
-                <a16:creationId xmlns:a16="http://schemas.microsoft.com/office/drawing/2014/main" id="{700A0932-9895-F782-C5C8-B585FE8693F3}"/>
-              </a:ext>
-            </a:extLst>
-          </p:cNvPr>
-          <p:cNvSpPr>
-            <a:spLocks noGrp="1" noRot="1" noChangeAspect="1"/>
-          </p:cNvSpPr>
-          <p:nvPr>
-            <p:ph type="sldImg"/>
-          </p:nvPr>
-        </p:nvSpPr>
-        <p:spPr/>
-      </p:sp>
-      <p:sp>
-        <p:nvSpPr>
-          <p:cNvPr id="3" name="Notes Placeholder 2">
-            <a:extLst>
-              <a:ext uri="{FF2B5EF4-FFF2-40B4-BE49-F238E27FC236}">
-                <a16:creationId xmlns:a16="http://schemas.microsoft.com/office/drawing/2014/main" id="{6A0FAAB7-C51A-4495-3337-3FEDABE48107}"/>
-              </a:ext>
-            </a:extLst>
-          </p:cNvPr>
-          <p:cNvSpPr>
-            <a:spLocks noGrp="1"/>
-          </p:cNvSpPr>
-          <p:nvPr>
-            <p:ph type="body" idx="1"/>
-          </p:nvPr>
-        </p:nvSpPr>
-        <p:spPr/>
-        <p:txBody>
-          <a:bodyPr/>
-          <a:lstStyle/>
-          <a:p>
-            <a:endParaRPr lang="en-US" dirty="0"/>
-          </a:p>
-        </p:txBody>
-      </p:sp>
-      <p:sp>
-        <p:nvSpPr>
-          <p:cNvPr id="4" name="Slide Number Placeholder 3">
-            <a:extLst>
-              <a:ext uri="{FF2B5EF4-FFF2-40B4-BE49-F238E27FC236}">
-                <a16:creationId xmlns:a16="http://schemas.microsoft.com/office/drawing/2014/main" id="{A6CF18D2-C7C3-43FF-3EF7-B8A60DC80771}"/>
-              </a:ext>
-            </a:extLst>
-          </p:cNvPr>
-          <p:cNvSpPr>
-            <a:spLocks noGrp="1"/>
-          </p:cNvSpPr>
-          <p:nvPr>
-            <p:ph type="sldNum" sz="quarter" idx="10"/>
-          </p:nvPr>
-        </p:nvSpPr>
-        <p:spPr/>
-        <p:txBody>
-          <a:bodyPr/>
-          <a:lstStyle/>
-          <a:p>
-            <a:fld id="{F7021451-1387-4CA6-816F-3879F97B5CBC}" type="slidenum">
-              <a:rPr lang="en-US"/>
-              <a:t>14</a:t>
-            </a:fld>
-            <a:endParaRPr lang="en-US" dirty="0"/>
-          </a:p>
-        </p:txBody>
-      </p:sp>
-    </p:spTree>
-    <p:extLst>
-      <p:ext uri="{BB962C8B-B14F-4D97-AF65-F5344CB8AC3E}">
-        <p14:creationId xmlns:p14="http://schemas.microsoft.com/office/powerpoint/2010/main" val="3739232732"/>
-      </p:ext>
-    </p:extLst>
-  </p:cSld>
-  <p:clrMapOvr>
-    <a:masterClrMapping/>
-  </p:clrMapOvr>
-</p:notes>
-</file>
-
-<file path=ppt/notesSlides/notesSlide15.xml><?xml version="1.0" encoding="utf-8"?>
-<p:notes xmlns:a="http://schemas.openxmlformats.org/drawingml/2006/main" xmlns:r="http://schemas.openxmlformats.org/officeDocument/2006/relationships" xmlns:p="http://schemas.openxmlformats.org/presentationml/2006/main">
-  <p:cSld>
-    <p:spTree>
-      <p:nvGrpSpPr>
-        <p:cNvPr id="1" name="">
-          <a:extLst>
-            <a:ext uri="{FF2B5EF4-FFF2-40B4-BE49-F238E27FC236}">
               <a16:creationId xmlns:a16="http://schemas.microsoft.com/office/drawing/2014/main" id="{96DBB7CF-3D78-4E43-DE87-C958AFD0494D}"/>
             </a:ext>
           </a:extLst>
@@ -879,7 +770,7 @@
           <a:p>
             <a:fld id="{F7021451-1387-4CA6-816F-3879F97B5CBC}" type="slidenum">
               <a:rPr lang="en-US"/>
-              <a:t>15</a:t>
+              <a:t>14</a:t>
             </a:fld>
             <a:endParaRPr lang="en-US" dirty="0"/>
           </a:p>
@@ -898,7 +789,7 @@
 </p:notes>
 </file>
 
-<file path=ppt/notesSlides/notesSlide16.xml><?xml version="1.0" encoding="utf-8"?>
+<file path=ppt/notesSlides/notesSlide15.xml><?xml version="1.0" encoding="utf-8"?>
 <p:notes xmlns:a="http://schemas.openxmlformats.org/drawingml/2006/main" xmlns:r="http://schemas.openxmlformats.org/officeDocument/2006/relationships" xmlns:p="http://schemas.openxmlformats.org/presentationml/2006/main">
   <p:cSld>
     <p:spTree>
@@ -987,7 +878,7 @@
           <a:p>
             <a:fld id="{F7021451-1387-4CA6-816F-3879F97B5CBC}" type="slidenum">
               <a:rPr lang="en-US"/>
-              <a:t>16</a:t>
+              <a:t>15</a:t>
             </a:fld>
             <a:endParaRPr lang="en-US" dirty="0"/>
           </a:p>
@@ -997,6 +888,90 @@
     <p:extLst>
       <p:ext uri="{BB962C8B-B14F-4D97-AF65-F5344CB8AC3E}">
         <p14:creationId xmlns:p14="http://schemas.microsoft.com/office/powerpoint/2010/main" val="538014674"/>
+      </p:ext>
+    </p:extLst>
+  </p:cSld>
+  <p:clrMapOvr>
+    <a:masterClrMapping/>
+  </p:clrMapOvr>
+</p:notes>
+</file>
+
+<file path=ppt/notesSlides/notesSlide16.xml><?xml version="1.0" encoding="utf-8"?>
+<p:notes xmlns:a="http://schemas.openxmlformats.org/drawingml/2006/main" xmlns:r="http://schemas.openxmlformats.org/officeDocument/2006/relationships" xmlns:p="http://schemas.openxmlformats.org/presentationml/2006/main">
+  <p:cSld>
+    <p:spTree>
+      <p:nvGrpSpPr>
+        <p:cNvPr id="1" name=""/>
+        <p:cNvGrpSpPr/>
+        <p:nvPr/>
+      </p:nvGrpSpPr>
+      <p:grpSpPr>
+        <a:xfrm>
+          <a:off x="0" y="0"/>
+          <a:ext cx="0" cy="0"/>
+          <a:chOff x="0" y="0"/>
+          <a:chExt cx="0" cy="0"/>
+        </a:xfrm>
+      </p:grpSpPr>
+      <p:sp>
+        <p:nvSpPr>
+          <p:cNvPr id="2" name="Slide Image Placeholder 1"/>
+          <p:cNvSpPr>
+            <a:spLocks noGrp="1" noRot="1" noChangeAspect="1"/>
+          </p:cNvSpPr>
+          <p:nvPr>
+            <p:ph type="sldImg"/>
+          </p:nvPr>
+        </p:nvSpPr>
+        <p:spPr/>
+      </p:sp>
+      <p:sp>
+        <p:nvSpPr>
+          <p:cNvPr id="3" name="Notes Placeholder 2"/>
+          <p:cNvSpPr>
+            <a:spLocks noGrp="1"/>
+          </p:cNvSpPr>
+          <p:nvPr>
+            <p:ph type="body" idx="1"/>
+          </p:nvPr>
+        </p:nvSpPr>
+        <p:spPr/>
+        <p:txBody>
+          <a:bodyPr/>
+          <a:lstStyle/>
+          <a:p>
+            <a:endParaRPr lang="en-US" dirty="0"/>
+          </a:p>
+        </p:txBody>
+      </p:sp>
+      <p:sp>
+        <p:nvSpPr>
+          <p:cNvPr id="4" name="Slide Number Placeholder 3"/>
+          <p:cNvSpPr>
+            <a:spLocks noGrp="1"/>
+          </p:cNvSpPr>
+          <p:nvPr>
+            <p:ph type="sldNum" sz="quarter" idx="10"/>
+          </p:nvPr>
+        </p:nvSpPr>
+        <p:spPr/>
+        <p:txBody>
+          <a:bodyPr/>
+          <a:lstStyle/>
+          <a:p>
+            <a:fld id="{F7021451-1387-4CA6-816F-3879F97B5CBC}" type="slidenum">
+              <a:rPr lang="en-US"/>
+              <a:t>16</a:t>
+            </a:fld>
+            <a:endParaRPr lang="en-US"/>
+          </a:p>
+        </p:txBody>
+      </p:sp>
+    </p:spTree>
+    <p:extLst>
+      <p:ext uri="{BB962C8B-B14F-4D97-AF65-F5344CB8AC3E}">
+        <p14:creationId xmlns:p14="http://schemas.microsoft.com/office/powerpoint/2010/main" val="1024086991"/>
       </p:ext>
     </p:extLst>
   </p:cSld>
@@ -1828,90 +1803,6 @@
             <a:fld id="{F7021451-1387-4CA6-816F-3879F97B5CBC}" type="slidenum">
               <a:rPr lang="en-US"/>
               <a:t>25</a:t>
-            </a:fld>
-            <a:endParaRPr lang="en-US"/>
-          </a:p>
-        </p:txBody>
-      </p:sp>
-    </p:spTree>
-    <p:extLst>
-      <p:ext uri="{BB962C8B-B14F-4D97-AF65-F5344CB8AC3E}">
-        <p14:creationId xmlns:p14="http://schemas.microsoft.com/office/powerpoint/2010/main" val="1024086991"/>
-      </p:ext>
-    </p:extLst>
-  </p:cSld>
-  <p:clrMapOvr>
-    <a:masterClrMapping/>
-  </p:clrMapOvr>
-</p:notes>
-</file>
-
-<file path=ppt/notesSlides/notesSlide26.xml><?xml version="1.0" encoding="utf-8"?>
-<p:notes xmlns:a="http://schemas.openxmlformats.org/drawingml/2006/main" xmlns:r="http://schemas.openxmlformats.org/officeDocument/2006/relationships" xmlns:p="http://schemas.openxmlformats.org/presentationml/2006/main">
-  <p:cSld>
-    <p:spTree>
-      <p:nvGrpSpPr>
-        <p:cNvPr id="1" name=""/>
-        <p:cNvGrpSpPr/>
-        <p:nvPr/>
-      </p:nvGrpSpPr>
-      <p:grpSpPr>
-        <a:xfrm>
-          <a:off x="0" y="0"/>
-          <a:ext cx="0" cy="0"/>
-          <a:chOff x="0" y="0"/>
-          <a:chExt cx="0" cy="0"/>
-        </a:xfrm>
-      </p:grpSpPr>
-      <p:sp>
-        <p:nvSpPr>
-          <p:cNvPr id="2" name="Slide Image Placeholder 1"/>
-          <p:cNvSpPr>
-            <a:spLocks noGrp="1" noRot="1" noChangeAspect="1"/>
-          </p:cNvSpPr>
-          <p:nvPr>
-            <p:ph type="sldImg"/>
-          </p:nvPr>
-        </p:nvSpPr>
-        <p:spPr/>
-      </p:sp>
-      <p:sp>
-        <p:nvSpPr>
-          <p:cNvPr id="3" name="Notes Placeholder 2"/>
-          <p:cNvSpPr>
-            <a:spLocks noGrp="1"/>
-          </p:cNvSpPr>
-          <p:nvPr>
-            <p:ph type="body" idx="1"/>
-          </p:nvPr>
-        </p:nvSpPr>
-        <p:spPr/>
-        <p:txBody>
-          <a:bodyPr/>
-          <a:lstStyle/>
-          <a:p>
-            <a:endParaRPr lang="en-US" dirty="0"/>
-          </a:p>
-        </p:txBody>
-      </p:sp>
-      <p:sp>
-        <p:nvSpPr>
-          <p:cNvPr id="4" name="Slide Number Placeholder 3"/>
-          <p:cNvSpPr>
-            <a:spLocks noGrp="1"/>
-          </p:cNvSpPr>
-          <p:nvPr>
-            <p:ph type="sldNum" sz="quarter" idx="10"/>
-          </p:nvPr>
-        </p:nvSpPr>
-        <p:spPr/>
-        <p:txBody>
-          <a:bodyPr/>
-          <a:lstStyle/>
-          <a:p>
-            <a:fld id="{F7021451-1387-4CA6-816F-3879F97B5CBC}" type="slidenum">
-              <a:rPr lang="en-US"/>
-              <a:t>26</a:t>
             </a:fld>
             <a:endParaRPr lang="en-US"/>
           </a:p>
@@ -5687,14 +5578,13 @@
         </p:nvPicPr>
         <p:blipFill>
           <a:blip r:embed="rId4"/>
-          <a:stretch>
-            <a:fillRect/>
-          </a:stretch>
+          <a:srcRect/>
+          <a:stretch/>
         </p:blipFill>
         <p:spPr>
           <a:xfrm>
             <a:off x="502920" y="1327104"/>
-            <a:ext cx="9279999" cy="5220000"/>
+            <a:ext cx="9279999" cy="5219999"/>
           </a:xfrm>
           <a:prstGeom prst="rect">
             <a:avLst/>
@@ -5710,267 +5600,6 @@
 </file>
 
 <file path=ppt/slides/slide14.xml><?xml version="1.0" encoding="utf-8"?>
-<p:sld xmlns:a="http://schemas.openxmlformats.org/drawingml/2006/main" xmlns:r="http://schemas.openxmlformats.org/officeDocument/2006/relationships" xmlns:p="http://schemas.openxmlformats.org/presentationml/2006/main">
-  <p:cSld>
-    <p:bg>
-      <p:bgPr>
-        <a:solidFill>
-          <a:srgbClr val="1B2333"/>
-        </a:solidFill>
-        <a:effectLst/>
-      </p:bgPr>
-    </p:bg>
-    <p:spTree>
-      <p:nvGrpSpPr>
-        <p:cNvPr id="1" name="">
-          <a:extLst>
-            <a:ext uri="{FF2B5EF4-FFF2-40B4-BE49-F238E27FC236}">
-              <a16:creationId xmlns:a16="http://schemas.microsoft.com/office/drawing/2014/main" id="{064B5B40-56FA-D487-7213-38F5830ABE35}"/>
-            </a:ext>
-          </a:extLst>
-        </p:cNvPr>
-        <p:cNvGrpSpPr/>
-        <p:nvPr/>
-      </p:nvGrpSpPr>
-      <p:grpSpPr>
-        <a:xfrm>
-          <a:off x="0" y="0"/>
-          <a:ext cx="0" cy="0"/>
-          <a:chOff x="0" y="0"/>
-          <a:chExt cx="0" cy="0"/>
-        </a:xfrm>
-      </p:grpSpPr>
-      <p:pic>
-        <p:nvPicPr>
-          <p:cNvPr id="40" name="Image 0" descr="/home/claude/work/bg/bg_content.png">
-            <a:extLst>
-              <a:ext uri="{FF2B5EF4-FFF2-40B4-BE49-F238E27FC236}">
-                <a16:creationId xmlns:a16="http://schemas.microsoft.com/office/drawing/2014/main" id="{182BDDD3-401A-C4B5-8D92-CBE020665893}"/>
-              </a:ext>
-            </a:extLst>
-          </p:cNvPr>
-          <p:cNvPicPr>
-            <a:picLocks noChangeAspect="1"/>
-          </p:cNvPicPr>
-          <p:nvPr/>
-        </p:nvPicPr>
-        <p:blipFill>
-          <a:blip r:embed="rId3"/>
-          <a:stretch>
-            <a:fillRect/>
-          </a:stretch>
-        </p:blipFill>
-        <p:spPr>
-          <a:xfrm>
-            <a:off x="0" y="0"/>
-            <a:ext cx="12191695" cy="6858000"/>
-          </a:xfrm>
-          <a:prstGeom prst="rect">
-            <a:avLst/>
-          </a:prstGeom>
-        </p:spPr>
-      </p:pic>
-      <p:sp>
-        <p:nvSpPr>
-          <p:cNvPr id="3" name="Text 0">
-            <a:extLst>
-              <a:ext uri="{FF2B5EF4-FFF2-40B4-BE49-F238E27FC236}">
-                <a16:creationId xmlns:a16="http://schemas.microsoft.com/office/drawing/2014/main" id="{DC691BD3-46FE-9645-EF65-A0C6228B0D8D}"/>
-              </a:ext>
-            </a:extLst>
-          </p:cNvPr>
-          <p:cNvSpPr/>
-          <p:nvPr/>
-        </p:nvSpPr>
-        <p:spPr>
-          <a:xfrm>
-            <a:off x="502920" y="384048"/>
-            <a:ext cx="9144000" cy="310896"/>
-          </a:xfrm>
-          <a:prstGeom prst="rect">
-            <a:avLst/>
-          </a:prstGeom>
-          <a:noFill/>
-          <a:ln/>
-        </p:spPr>
-        <p:txBody>
-          <a:bodyPr wrap="square" lIns="0" tIns="0" rIns="0" bIns="0" rtlCol="0" anchor="ctr"/>
-          <a:lstStyle/>
-          <a:p>
-            <a:pPr marL="0" indent="0">
-              <a:buNone/>
-            </a:pPr>
-            <a:r>
-              <a:rPr lang="en-US" sz="1300" b="1" kern="0" spc="200" dirty="0">
-                <a:solidFill>
-                  <a:srgbClr val="FF7900"/>
-                </a:solidFill>
-                <a:latin typeface="Calibri" pitchFamily="34" charset="0"/>
-                <a:ea typeface="Calibri" pitchFamily="34" charset="-122"/>
-                <a:cs typeface="Calibri" pitchFamily="34" charset="-120"/>
-              </a:rPr>
-              <a:t>PERSONAS</a:t>
-            </a:r>
-            <a:endParaRPr lang="en-US" sz="1300" dirty="0"/>
-          </a:p>
-        </p:txBody>
-      </p:sp>
-      <p:sp>
-        <p:nvSpPr>
-          <p:cNvPr id="4" name="Text 1">
-            <a:extLst>
-              <a:ext uri="{FF2B5EF4-FFF2-40B4-BE49-F238E27FC236}">
-                <a16:creationId xmlns:a16="http://schemas.microsoft.com/office/drawing/2014/main" id="{5CAC12CE-A145-D035-8272-B4C11711C3DA}"/>
-              </a:ext>
-            </a:extLst>
-          </p:cNvPr>
-          <p:cNvSpPr/>
-          <p:nvPr/>
-        </p:nvSpPr>
-        <p:spPr>
-          <a:xfrm>
-            <a:off x="502920" y="658368"/>
-            <a:ext cx="10607040" cy="685800"/>
-          </a:xfrm>
-          <a:prstGeom prst="rect">
-            <a:avLst/>
-          </a:prstGeom>
-          <a:noFill/>
-          <a:ln/>
-        </p:spPr>
-        <p:txBody>
-          <a:bodyPr wrap="square" lIns="0" tIns="0" rIns="0" bIns="0" rtlCol="0" anchor="ctr"/>
-          <a:lstStyle/>
-          <a:p>
-            <a:pPr marL="0" indent="0">
-              <a:buNone/>
-            </a:pPr>
-            <a:r>
-              <a:rPr lang="fr-FR" sz="2800" b="1" dirty="0">
-                <a:solidFill>
-                  <a:srgbClr val="FFFFFF"/>
-                </a:solidFill>
-                <a:latin typeface="Montserrat" pitchFamily="34" charset="0"/>
-                <a:ea typeface="Montserrat" pitchFamily="34" charset="-122"/>
-                <a:cs typeface="Montserrat" pitchFamily="34" charset="-120"/>
-              </a:rPr>
-              <a:t>2</a:t>
-            </a:r>
-            <a:r>
-              <a:rPr lang="fr-FR" sz="2800" b="1" noProof="0" dirty="0" err="1">
-                <a:solidFill>
-                  <a:srgbClr val="FFFFFF"/>
-                </a:solidFill>
-                <a:latin typeface="Montserrat" pitchFamily="34" charset="0"/>
-                <a:ea typeface="Montserrat" pitchFamily="34" charset="-122"/>
-                <a:cs typeface="Montserrat" pitchFamily="34" charset="-120"/>
-              </a:rPr>
-              <a:t>ème</a:t>
-            </a:r>
-            <a:r>
-              <a:rPr lang="fr-FR" sz="2800" b="1" noProof="0" dirty="0">
-                <a:solidFill>
-                  <a:srgbClr val="FFFFFF"/>
-                </a:solidFill>
-                <a:latin typeface="Montserrat" pitchFamily="34" charset="0"/>
-                <a:ea typeface="Montserrat" pitchFamily="34" charset="-122"/>
-                <a:cs typeface="Montserrat" pitchFamily="34" charset="-120"/>
-              </a:rPr>
-              <a:t> situation réelle de fraude</a:t>
-            </a:r>
-            <a:endParaRPr lang="fr-FR" sz="2800" noProof="0" dirty="0"/>
-          </a:p>
-        </p:txBody>
-      </p:sp>
-      <p:sp>
-        <p:nvSpPr>
-          <p:cNvPr id="38" name="Text 32">
-            <a:extLst>
-              <a:ext uri="{FF2B5EF4-FFF2-40B4-BE49-F238E27FC236}">
-                <a16:creationId xmlns:a16="http://schemas.microsoft.com/office/drawing/2014/main" id="{0F063FEE-F9E6-A539-2713-0565D6B9A687}"/>
-              </a:ext>
-            </a:extLst>
-          </p:cNvPr>
-          <p:cNvSpPr/>
-          <p:nvPr/>
-        </p:nvSpPr>
-        <p:spPr>
-          <a:xfrm>
-            <a:off x="11368735" y="6400800"/>
-            <a:ext cx="548640" cy="292608"/>
-          </a:xfrm>
-          <a:prstGeom prst="rect">
-            <a:avLst/>
-          </a:prstGeom>
-          <a:noFill/>
-          <a:ln/>
-        </p:spPr>
-        <p:txBody>
-          <a:bodyPr wrap="square" lIns="0" tIns="0" rIns="0" bIns="0" rtlCol="0" anchor="ctr"/>
-          <a:lstStyle/>
-          <a:p>
-            <a:pPr marL="0" indent="0" algn="r">
-              <a:buNone/>
-            </a:pPr>
-            <a:r>
-              <a:rPr lang="en-US" sz="1100" dirty="0">
-                <a:solidFill>
-                  <a:srgbClr val="8891A3"/>
-                </a:solidFill>
-                <a:latin typeface="Calibri" pitchFamily="34" charset="0"/>
-                <a:ea typeface="Calibri" pitchFamily="34" charset="-122"/>
-                <a:cs typeface="Calibri" pitchFamily="34" charset="-120"/>
-              </a:rPr>
-              <a:t>14</a:t>
-            </a:r>
-            <a:endParaRPr lang="en-US" sz="1100" dirty="0"/>
-          </a:p>
-        </p:txBody>
-      </p:sp>
-      <p:pic>
-        <p:nvPicPr>
-          <p:cNvPr id="5" name="Image 4">
-            <a:extLst>
-              <a:ext uri="{FF2B5EF4-FFF2-40B4-BE49-F238E27FC236}">
-                <a16:creationId xmlns:a16="http://schemas.microsoft.com/office/drawing/2014/main" id="{A4B872D9-D05C-8F8D-93B8-861A2A6D2CEE}"/>
-              </a:ext>
-            </a:extLst>
-          </p:cNvPr>
-          <p:cNvPicPr>
-            <a:picLocks noChangeAspect="1"/>
-          </p:cNvPicPr>
-          <p:nvPr/>
-        </p:nvPicPr>
-        <p:blipFill>
-          <a:blip r:embed="rId4"/>
-          <a:stretch>
-            <a:fillRect/>
-          </a:stretch>
-        </p:blipFill>
-        <p:spPr>
-          <a:xfrm>
-            <a:off x="502920" y="1327104"/>
-            <a:ext cx="9280000" cy="5220000"/>
-          </a:xfrm>
-          <a:prstGeom prst="rect">
-            <a:avLst/>
-          </a:prstGeom>
-        </p:spPr>
-      </p:pic>
-    </p:spTree>
-    <p:extLst>
-      <p:ext uri="{BB962C8B-B14F-4D97-AF65-F5344CB8AC3E}">
-        <p14:creationId xmlns:p14="http://schemas.microsoft.com/office/powerpoint/2010/main" val="3462195490"/>
-      </p:ext>
-    </p:extLst>
-  </p:cSld>
-  <p:clrMapOvr>
-    <a:masterClrMapping/>
-  </p:clrMapOvr>
-</p:sld>
-</file>
-
-<file path=ppt/slides/slide15.xml><?xml version="1.0" encoding="utf-8"?>
 <p:sld xmlns:a="http://schemas.openxmlformats.org/drawingml/2006/main" xmlns:r="http://schemas.openxmlformats.org/officeDocument/2006/relationships" xmlns:p="http://schemas.openxmlformats.org/presentationml/2006/main">
   <p:cSld>
     <p:bg>
@@ -6112,7 +5741,7 @@
                 <a:ea typeface="Montserrat" pitchFamily="34" charset="-122"/>
                 <a:cs typeface="Montserrat" pitchFamily="34" charset="-120"/>
               </a:rPr>
-              <a:t>3ème</a:t>
+              <a:t>2ème</a:t>
             </a:r>
             <a:r>
               <a:rPr lang="fr-FR" sz="2800" b="1" noProof="0" dirty="0">
@@ -6168,7 +5797,7 @@
                 <a:ea typeface="Calibri" pitchFamily="34" charset="-122"/>
                 <a:cs typeface="Calibri" pitchFamily="34" charset="-120"/>
               </a:rPr>
-              <a:t>15</a:t>
+              <a:t>14</a:t>
             </a:r>
             <a:endParaRPr lang="en-US" sz="1100" dirty="0"/>
           </a:p>
@@ -6190,14 +5819,13 @@
         </p:nvPicPr>
         <p:blipFill>
           <a:blip r:embed="rId4"/>
-          <a:stretch>
-            <a:fillRect/>
-          </a:stretch>
+          <a:srcRect/>
+          <a:stretch/>
         </p:blipFill>
         <p:spPr>
           <a:xfrm>
             <a:off x="502920" y="1327104"/>
-            <a:ext cx="9280000" cy="5220000"/>
+            <a:ext cx="9280000" cy="5219999"/>
           </a:xfrm>
           <a:prstGeom prst="rect">
             <a:avLst/>
@@ -6217,7 +5845,7 @@
 </p:sld>
 </file>
 
-<file path=ppt/slides/slide16.xml><?xml version="1.0" encoding="utf-8"?>
+<file path=ppt/slides/slide15.xml><?xml version="1.0" encoding="utf-8"?>
 <p:sld xmlns:a="http://schemas.openxmlformats.org/drawingml/2006/main" xmlns:r="http://schemas.openxmlformats.org/officeDocument/2006/relationships" xmlns:p="http://schemas.openxmlformats.org/presentationml/2006/main">
   <p:cSld>
     <p:bg>
@@ -6359,7 +5987,7 @@
                 <a:ea typeface="Montserrat" pitchFamily="34" charset="-122"/>
                 <a:cs typeface="Montserrat" pitchFamily="34" charset="-120"/>
               </a:rPr>
-              <a:t>4ème</a:t>
+              <a:t>3ème</a:t>
             </a:r>
             <a:r>
               <a:rPr lang="fr-FR" sz="2800" b="1" noProof="0" dirty="0">
@@ -6415,7 +6043,7 @@
                 <a:ea typeface="Calibri" pitchFamily="34" charset="-122"/>
                 <a:cs typeface="Calibri" pitchFamily="34" charset="-120"/>
               </a:rPr>
-              <a:t>16</a:t>
+              <a:t>15</a:t>
             </a:r>
             <a:endParaRPr lang="en-US" sz="1100" dirty="0"/>
           </a:p>
@@ -6437,14 +6065,13 @@
         </p:nvPicPr>
         <p:blipFill>
           <a:blip r:embed="rId4"/>
-          <a:stretch>
-            <a:fillRect/>
-          </a:stretch>
+          <a:srcRect/>
+          <a:stretch/>
         </p:blipFill>
         <p:spPr>
           <a:xfrm>
             <a:off x="502920" y="1327104"/>
-            <a:ext cx="9280000" cy="5220000"/>
+            <a:ext cx="9280000" cy="5219999"/>
           </a:xfrm>
           <a:prstGeom prst="rect">
             <a:avLst/>
@@ -6464,7 +6091,7 @@
 </p:sld>
 </file>
 
-<file path=ppt/slides/slide17.xml><?xml version="1.0" encoding="utf-8"?>
+<file path=ppt/slides/slide16.xml><?xml version="1.0" encoding="utf-8"?>
 <p:sld xmlns:a="http://schemas.openxmlformats.org/drawingml/2006/main" xmlns:r="http://schemas.openxmlformats.org/officeDocument/2006/relationships" xmlns:p="http://schemas.openxmlformats.org/presentationml/2006/main">
   <p:cSld name="Slide 14">
     <p:bg>
@@ -6826,7 +6453,7 @@
                 <a:ea typeface="Calibri" pitchFamily="34" charset="-122"/>
                 <a:cs typeface="Calibri" pitchFamily="34" charset="-120"/>
               </a:rPr>
-              <a:t>17</a:t>
+              <a:t>16</a:t>
             </a:r>
             <a:endParaRPr lang="en-US" sz="1100" dirty="0"/>
           </a:p>
@@ -6840,7 +6467,7 @@
 </p:sld>
 </file>
 
-<file path=ppt/slides/slide18.xml><?xml version="1.0" encoding="utf-8"?>
+<file path=ppt/slides/slide17.xml><?xml version="1.0" encoding="utf-8"?>
 <p:sld xmlns:a="http://schemas.openxmlformats.org/drawingml/2006/main" xmlns:r="http://schemas.openxmlformats.org/officeDocument/2006/relationships" xmlns:p="http://schemas.openxmlformats.org/presentationml/2006/main">
   <p:cSld name="Slide 15">
     <p:bg>
@@ -7499,7 +7126,7 @@
                 <a:ea typeface="Calibri" pitchFamily="34" charset="-122"/>
                 <a:cs typeface="Calibri" pitchFamily="34" charset="-120"/>
               </a:rPr>
-              <a:t>18</a:t>
+              <a:t>17</a:t>
             </a:r>
             <a:endParaRPr lang="en-US" sz="1100" dirty="0"/>
           </a:p>
@@ -7513,7 +7140,7 @@
 </p:sld>
 </file>
 
-<file path=ppt/slides/slide19.xml><?xml version="1.0" encoding="utf-8"?>
+<file path=ppt/slides/slide18.xml><?xml version="1.0" encoding="utf-8"?>
 <p:sld xmlns:a="http://schemas.openxmlformats.org/drawingml/2006/main" xmlns:r="http://schemas.openxmlformats.org/officeDocument/2006/relationships" xmlns:p="http://schemas.openxmlformats.org/presentationml/2006/main">
   <p:cSld name="Slide 16">
     <p:bg>
@@ -8629,6 +8256,382 @@
       <p:sp>
         <p:nvSpPr>
           <p:cNvPr id="35" name="Text 27"/>
+          <p:cNvSpPr/>
+          <p:nvPr/>
+        </p:nvSpPr>
+        <p:spPr>
+          <a:xfrm>
+            <a:off x="11368735" y="6400800"/>
+            <a:ext cx="548640" cy="292608"/>
+          </a:xfrm>
+          <a:prstGeom prst="rect">
+            <a:avLst/>
+          </a:prstGeom>
+          <a:noFill/>
+          <a:ln/>
+        </p:spPr>
+        <p:txBody>
+          <a:bodyPr wrap="square" lIns="0" tIns="0" rIns="0" bIns="0" rtlCol="0" anchor="ctr"/>
+          <a:lstStyle/>
+          <a:p>
+            <a:pPr marL="0" indent="0" algn="r">
+              <a:buNone/>
+            </a:pPr>
+            <a:r>
+              <a:rPr lang="en-US" sz="1100" dirty="0">
+                <a:solidFill>
+                  <a:srgbClr val="8891A3"/>
+                </a:solidFill>
+                <a:latin typeface="Calibri" pitchFamily="34" charset="0"/>
+                <a:ea typeface="Calibri" pitchFamily="34" charset="-122"/>
+                <a:cs typeface="Calibri" pitchFamily="34" charset="-120"/>
+              </a:rPr>
+              <a:t>18</a:t>
+            </a:r>
+            <a:endParaRPr lang="en-US" sz="1100" dirty="0"/>
+          </a:p>
+        </p:txBody>
+      </p:sp>
+    </p:spTree>
+  </p:cSld>
+  <p:clrMapOvr>
+    <a:masterClrMapping/>
+  </p:clrMapOvr>
+</p:sld>
+</file>
+
+<file path=ppt/slides/slide19.xml><?xml version="1.0" encoding="utf-8"?>
+<p:sld xmlns:a="http://schemas.openxmlformats.org/drawingml/2006/main" xmlns:r="http://schemas.openxmlformats.org/officeDocument/2006/relationships" xmlns:p="http://schemas.openxmlformats.org/presentationml/2006/main">
+  <p:cSld name="Slide 17">
+    <p:bg>
+      <p:bgPr>
+        <a:solidFill>
+          <a:srgbClr val="1B2333"/>
+        </a:solidFill>
+        <a:effectLst/>
+      </p:bgPr>
+    </p:bg>
+    <p:spTree>
+      <p:nvGrpSpPr>
+        <p:cNvPr id="1" name=""/>
+        <p:cNvGrpSpPr/>
+        <p:nvPr/>
+      </p:nvGrpSpPr>
+      <p:grpSpPr>
+        <a:xfrm>
+          <a:off x="0" y="0"/>
+          <a:ext cx="0" cy="0"/>
+          <a:chOff x="0" y="0"/>
+          <a:chExt cx="0" cy="0"/>
+        </a:xfrm>
+      </p:grpSpPr>
+      <p:pic>
+        <p:nvPicPr>
+          <p:cNvPr id="2" name="Image 0" descr="/home/claude/work/bg/bg_divider.png"/>
+          <p:cNvPicPr>
+            <a:picLocks noChangeAspect="1"/>
+          </p:cNvPicPr>
+          <p:nvPr/>
+        </p:nvPicPr>
+        <p:blipFill>
+          <a:blip r:embed="rId3"/>
+          <a:stretch>
+            <a:fillRect/>
+          </a:stretch>
+        </p:blipFill>
+        <p:spPr>
+          <a:xfrm>
+            <a:off x="0" y="0"/>
+            <a:ext cx="12191695" cy="6858000"/>
+          </a:xfrm>
+          <a:prstGeom prst="rect">
+            <a:avLst/>
+          </a:prstGeom>
+        </p:spPr>
+      </p:pic>
+      <p:sp>
+        <p:nvSpPr>
+          <p:cNvPr id="3" name="Text 0"/>
+          <p:cNvSpPr/>
+          <p:nvPr/>
+        </p:nvSpPr>
+        <p:spPr>
+          <a:xfrm>
+            <a:off x="731520" y="1051560"/>
+            <a:ext cx="5486400" cy="320040"/>
+          </a:xfrm>
+          <a:prstGeom prst="rect">
+            <a:avLst/>
+          </a:prstGeom>
+          <a:noFill/>
+          <a:ln/>
+        </p:spPr>
+        <p:txBody>
+          <a:bodyPr wrap="square" lIns="0" tIns="0" rIns="0" bIns="0" rtlCol="0" anchor="ctr"/>
+          <a:lstStyle/>
+          <a:p>
+            <a:pPr marL="0" indent="0">
+              <a:buNone/>
+            </a:pPr>
+            <a:r>
+              <a:rPr lang="en-US" sz="1300" b="1" kern="0" spc="200" dirty="0">
+                <a:solidFill>
+                  <a:srgbClr val="4D6AB1"/>
+                </a:solidFill>
+                <a:latin typeface="Calibri" pitchFamily="34" charset="0"/>
+                <a:ea typeface="Calibri" pitchFamily="34" charset="-122"/>
+                <a:cs typeface="Calibri" pitchFamily="34" charset="-120"/>
+              </a:rPr>
+              <a:t>SECTION 07 / 09</a:t>
+            </a:r>
+            <a:endParaRPr lang="en-US" sz="1300" dirty="0"/>
+          </a:p>
+        </p:txBody>
+      </p:sp>
+      <p:sp>
+        <p:nvSpPr>
+          <p:cNvPr id="4" name="Text 1"/>
+          <p:cNvSpPr/>
+          <p:nvPr/>
+        </p:nvSpPr>
+        <p:spPr>
+          <a:xfrm>
+            <a:off x="731520" y="1417320"/>
+            <a:ext cx="6858000" cy="457200"/>
+          </a:xfrm>
+          <a:prstGeom prst="rect">
+            <a:avLst/>
+          </a:prstGeom>
+          <a:noFill/>
+          <a:ln/>
+        </p:spPr>
+        <p:txBody>
+          <a:bodyPr wrap="square" lIns="0" tIns="0" rIns="0" bIns="0" rtlCol="0" anchor="ctr"/>
+          <a:lstStyle/>
+          <a:p>
+            <a:pPr marL="0" indent="0">
+              <a:buNone/>
+            </a:pPr>
+            <a:r>
+              <a:rPr lang="en-US" sz="1500" b="1" kern="0" spc="150" dirty="0">
+                <a:solidFill>
+                  <a:srgbClr val="C9CEDA"/>
+                </a:solidFill>
+                <a:latin typeface="Calibri" pitchFamily="34" charset="0"/>
+                <a:ea typeface="Calibri" pitchFamily="34" charset="-122"/>
+                <a:cs typeface="Calibri" pitchFamily="34" charset="-120"/>
+              </a:rPr>
+              <a:t>SE DIFFÉRENCIER</a:t>
+            </a:r>
+            <a:endParaRPr lang="en-US" sz="1500" dirty="0"/>
+          </a:p>
+        </p:txBody>
+      </p:sp>
+      <p:sp>
+        <p:nvSpPr>
+          <p:cNvPr id="5" name="Text 2"/>
+          <p:cNvSpPr/>
+          <p:nvPr/>
+        </p:nvSpPr>
+        <p:spPr>
+          <a:xfrm>
+            <a:off x="731520" y="2468880"/>
+            <a:ext cx="6949440" cy="1920240"/>
+          </a:xfrm>
+          <a:prstGeom prst="rect">
+            <a:avLst/>
+          </a:prstGeom>
+          <a:noFill/>
+          <a:ln/>
+        </p:spPr>
+        <p:txBody>
+          <a:bodyPr wrap="square" lIns="0" tIns="0" rIns="0" bIns="0" rtlCol="0" anchor="ctr"/>
+          <a:lstStyle/>
+          <a:p>
+            <a:pPr marL="0" indent="0">
+              <a:lnSpc>
+                <a:spcPct val="105000"/>
+              </a:lnSpc>
+              <a:buNone/>
+            </a:pPr>
+            <a:r>
+              <a:rPr lang="fr-FR" sz="4600" b="1" noProof="0" dirty="0">
+                <a:solidFill>
+                  <a:srgbClr val="FFFFFF"/>
+                </a:solidFill>
+                <a:latin typeface="Montserrat" pitchFamily="34" charset="0"/>
+                <a:ea typeface="Montserrat" pitchFamily="34" charset="-122"/>
+                <a:cs typeface="Montserrat" pitchFamily="34" charset="-120"/>
+              </a:rPr>
+              <a:t>Positionnement</a:t>
+            </a:r>
+            <a:endParaRPr lang="fr-FR" sz="4600" noProof="0" dirty="0"/>
+          </a:p>
+        </p:txBody>
+      </p:sp>
+      <p:sp>
+        <p:nvSpPr>
+          <p:cNvPr id="6" name="Shape 3"/>
+          <p:cNvSpPr/>
+          <p:nvPr/>
+        </p:nvSpPr>
+        <p:spPr>
+          <a:xfrm>
+            <a:off x="749808" y="2212848"/>
+            <a:ext cx="640080" cy="45720"/>
+          </a:xfrm>
+          <a:prstGeom prst="rect">
+            <a:avLst/>
+          </a:prstGeom>
+          <a:solidFill>
+            <a:srgbClr val="4D6AB1"/>
+          </a:solidFill>
+          <a:ln/>
+        </p:spPr>
+        <p:txBody>
+          <a:bodyPr/>
+          <a:lstStyle/>
+          <a:p>
+            <a:endParaRPr lang="fr-FR"/>
+          </a:p>
+        </p:txBody>
+      </p:sp>
+      <p:sp>
+        <p:nvSpPr>
+          <p:cNvPr id="7" name="Text 4"/>
+          <p:cNvSpPr/>
+          <p:nvPr/>
+        </p:nvSpPr>
+        <p:spPr>
+          <a:xfrm>
+            <a:off x="731520" y="4572000"/>
+            <a:ext cx="6400800" cy="1005840"/>
+          </a:xfrm>
+          <a:prstGeom prst="rect">
+            <a:avLst/>
+          </a:prstGeom>
+          <a:noFill/>
+          <a:ln/>
+        </p:spPr>
+        <p:txBody>
+          <a:bodyPr wrap="square" lIns="0" tIns="0" rIns="0" bIns="0" rtlCol="0" anchor="ctr"/>
+          <a:lstStyle/>
+          <a:p>
+            <a:pPr marL="0" indent="0">
+              <a:lnSpc>
+                <a:spcPct val="130000"/>
+              </a:lnSpc>
+              <a:buNone/>
+            </a:pPr>
+            <a:r>
+              <a:rPr lang="fr-FR" sz="1500" noProof="0" dirty="0">
+                <a:solidFill>
+                  <a:srgbClr val="C9CEDA"/>
+                </a:solidFill>
+                <a:latin typeface="Calibri" pitchFamily="34" charset="0"/>
+                <a:ea typeface="Calibri" pitchFamily="34" charset="-122"/>
+                <a:cs typeface="Calibri" pitchFamily="34" charset="-120"/>
+              </a:rPr>
+              <a:t>Ceux avec quoi KWISMO se différencie par rapport à la concurrence.</a:t>
+            </a:r>
+            <a:endParaRPr lang="fr-FR" sz="1500" noProof="0" dirty="0"/>
+          </a:p>
+        </p:txBody>
+      </p:sp>
+      <p:sp>
+        <p:nvSpPr>
+          <p:cNvPr id="8" name="Shape 5"/>
+          <p:cNvSpPr/>
+          <p:nvPr/>
+        </p:nvSpPr>
+        <p:spPr>
+          <a:xfrm>
+            <a:off x="9144000" y="1463040"/>
+            <a:ext cx="3931920" cy="3931920"/>
+          </a:xfrm>
+          <a:prstGeom prst="ellipse">
+            <a:avLst/>
+          </a:prstGeom>
+          <a:ln w="15875">
+            <a:solidFill>
+              <a:srgbClr val="4D6AB1">
+                <a:alpha val="45000"/>
+              </a:srgbClr>
+            </a:solidFill>
+            <a:prstDash val="solid"/>
+          </a:ln>
+        </p:spPr>
+        <p:txBody>
+          <a:bodyPr/>
+          <a:lstStyle/>
+          <a:p>
+            <a:endParaRPr lang="fr-FR"/>
+          </a:p>
+        </p:txBody>
+      </p:sp>
+      <p:sp>
+        <p:nvSpPr>
+          <p:cNvPr id="9" name="Shape 6"/>
+          <p:cNvSpPr/>
+          <p:nvPr/>
+        </p:nvSpPr>
+        <p:spPr>
+          <a:xfrm>
+            <a:off x="9464040" y="1783080"/>
+            <a:ext cx="3291840" cy="3291840"/>
+          </a:xfrm>
+          <a:prstGeom prst="ellipse">
+            <a:avLst/>
+          </a:prstGeom>
+          <a:solidFill>
+            <a:srgbClr val="4D6AB1">
+              <a:alpha val="15000"/>
+            </a:srgbClr>
+          </a:solidFill>
+          <a:ln w="19050">
+            <a:solidFill>
+              <a:srgbClr val="4D6AB1">
+                <a:alpha val="75000"/>
+              </a:srgbClr>
+            </a:solidFill>
+            <a:prstDash val="solid"/>
+          </a:ln>
+        </p:spPr>
+        <p:txBody>
+          <a:bodyPr/>
+          <a:lstStyle/>
+          <a:p>
+            <a:endParaRPr lang="fr-FR"/>
+          </a:p>
+        </p:txBody>
+      </p:sp>
+      <p:pic>
+        <p:nvPicPr>
+          <p:cNvPr id="10" name="Image 1" descr="/home/claude/work/icons/layers_FFFFFF.png"/>
+          <p:cNvPicPr>
+            <a:picLocks noChangeAspect="1"/>
+          </p:cNvPicPr>
+          <p:nvPr/>
+        </p:nvPicPr>
+        <p:blipFill>
+          <a:blip r:embed="rId4"/>
+          <a:stretch>
+            <a:fillRect/>
+          </a:stretch>
+        </p:blipFill>
+        <p:spPr>
+          <a:xfrm>
+            <a:off x="10254082" y="2573122"/>
+            <a:ext cx="1711757" cy="1711757"/>
+          </a:xfrm>
+          <a:prstGeom prst="rect">
+            <a:avLst/>
+          </a:prstGeom>
+        </p:spPr>
+      </p:pic>
+      <p:sp>
+        <p:nvSpPr>
+          <p:cNvPr id="11" name="Text 7"/>
           <p:cNvSpPr/>
           <p:nvPr/>
         </p:nvSpPr>
@@ -9754,7 +9757,7 @@
                 <a:ea typeface="Calibri" pitchFamily="34" charset="-122"/>
                 <a:cs typeface="Calibri" pitchFamily="34" charset="-120"/>
               </a:rPr>
-              <a:t>P.17</a:t>
+              <a:t>P.16</a:t>
             </a:r>
             <a:endParaRPr lang="en-US" sz="1300" dirty="0"/>
           </a:p>
@@ -9914,7 +9917,7 @@
                 <a:ea typeface="Calibri" pitchFamily="34" charset="-122"/>
                 <a:cs typeface="Calibri" pitchFamily="34" charset="-120"/>
               </a:rPr>
-              <a:t>P.19</a:t>
+              <a:t>P.18</a:t>
             </a:r>
             <a:endParaRPr lang="en-US" sz="1300" dirty="0"/>
           </a:p>
@@ -10074,7 +10077,7 @@
                 <a:ea typeface="Calibri" pitchFamily="34" charset="-122"/>
                 <a:cs typeface="Calibri" pitchFamily="34" charset="-120"/>
               </a:rPr>
-              <a:t>P.20</a:t>
+              <a:t>P.19</a:t>
             </a:r>
             <a:endParaRPr lang="en-US" sz="1300" dirty="0"/>
           </a:p>
@@ -10234,7 +10237,7 @@
                 <a:ea typeface="Calibri" pitchFamily="34" charset="-122"/>
                 <a:cs typeface="Calibri" pitchFamily="34" charset="-120"/>
               </a:rPr>
-              <a:t>P.23</a:t>
+              <a:t>P.21</a:t>
             </a:r>
             <a:endParaRPr lang="en-US" sz="1300" dirty="0"/>
           </a:p>
@@ -10394,7 +10397,7 @@
                 <a:ea typeface="Calibri" pitchFamily="34" charset="-122"/>
                 <a:cs typeface="Calibri" pitchFamily="34" charset="-120"/>
               </a:rPr>
-              <a:t>P.25</a:t>
+              <a:t>P.23</a:t>
             </a:r>
             <a:endParaRPr lang="en-US" sz="1300" dirty="0"/>
           </a:p>
@@ -10448,382 +10451,6 @@
 </file>
 
 <file path=ppt/slides/slide20.xml><?xml version="1.0" encoding="utf-8"?>
-<p:sld xmlns:a="http://schemas.openxmlformats.org/drawingml/2006/main" xmlns:r="http://schemas.openxmlformats.org/officeDocument/2006/relationships" xmlns:p="http://schemas.openxmlformats.org/presentationml/2006/main">
-  <p:cSld name="Slide 17">
-    <p:bg>
-      <p:bgPr>
-        <a:solidFill>
-          <a:srgbClr val="1B2333"/>
-        </a:solidFill>
-        <a:effectLst/>
-      </p:bgPr>
-    </p:bg>
-    <p:spTree>
-      <p:nvGrpSpPr>
-        <p:cNvPr id="1" name=""/>
-        <p:cNvGrpSpPr/>
-        <p:nvPr/>
-      </p:nvGrpSpPr>
-      <p:grpSpPr>
-        <a:xfrm>
-          <a:off x="0" y="0"/>
-          <a:ext cx="0" cy="0"/>
-          <a:chOff x="0" y="0"/>
-          <a:chExt cx="0" cy="0"/>
-        </a:xfrm>
-      </p:grpSpPr>
-      <p:pic>
-        <p:nvPicPr>
-          <p:cNvPr id="2" name="Image 0" descr="/home/claude/work/bg/bg_divider.png"/>
-          <p:cNvPicPr>
-            <a:picLocks noChangeAspect="1"/>
-          </p:cNvPicPr>
-          <p:nvPr/>
-        </p:nvPicPr>
-        <p:blipFill>
-          <a:blip r:embed="rId3"/>
-          <a:stretch>
-            <a:fillRect/>
-          </a:stretch>
-        </p:blipFill>
-        <p:spPr>
-          <a:xfrm>
-            <a:off x="0" y="0"/>
-            <a:ext cx="12191695" cy="6858000"/>
-          </a:xfrm>
-          <a:prstGeom prst="rect">
-            <a:avLst/>
-          </a:prstGeom>
-        </p:spPr>
-      </p:pic>
-      <p:sp>
-        <p:nvSpPr>
-          <p:cNvPr id="3" name="Text 0"/>
-          <p:cNvSpPr/>
-          <p:nvPr/>
-        </p:nvSpPr>
-        <p:spPr>
-          <a:xfrm>
-            <a:off x="731520" y="1051560"/>
-            <a:ext cx="5486400" cy="320040"/>
-          </a:xfrm>
-          <a:prstGeom prst="rect">
-            <a:avLst/>
-          </a:prstGeom>
-          <a:noFill/>
-          <a:ln/>
-        </p:spPr>
-        <p:txBody>
-          <a:bodyPr wrap="square" lIns="0" tIns="0" rIns="0" bIns="0" rtlCol="0" anchor="ctr"/>
-          <a:lstStyle/>
-          <a:p>
-            <a:pPr marL="0" indent="0">
-              <a:buNone/>
-            </a:pPr>
-            <a:r>
-              <a:rPr lang="en-US" sz="1300" b="1" kern="0" spc="200" dirty="0">
-                <a:solidFill>
-                  <a:srgbClr val="4D6AB1"/>
-                </a:solidFill>
-                <a:latin typeface="Calibri" pitchFamily="34" charset="0"/>
-                <a:ea typeface="Calibri" pitchFamily="34" charset="-122"/>
-                <a:cs typeface="Calibri" pitchFamily="34" charset="-120"/>
-              </a:rPr>
-              <a:t>SECTION 07 / 09</a:t>
-            </a:r>
-            <a:endParaRPr lang="en-US" sz="1300" dirty="0"/>
-          </a:p>
-        </p:txBody>
-      </p:sp>
-      <p:sp>
-        <p:nvSpPr>
-          <p:cNvPr id="4" name="Text 1"/>
-          <p:cNvSpPr/>
-          <p:nvPr/>
-        </p:nvSpPr>
-        <p:spPr>
-          <a:xfrm>
-            <a:off x="731520" y="1417320"/>
-            <a:ext cx="6858000" cy="457200"/>
-          </a:xfrm>
-          <a:prstGeom prst="rect">
-            <a:avLst/>
-          </a:prstGeom>
-          <a:noFill/>
-          <a:ln/>
-        </p:spPr>
-        <p:txBody>
-          <a:bodyPr wrap="square" lIns="0" tIns="0" rIns="0" bIns="0" rtlCol="0" anchor="ctr"/>
-          <a:lstStyle/>
-          <a:p>
-            <a:pPr marL="0" indent="0">
-              <a:buNone/>
-            </a:pPr>
-            <a:r>
-              <a:rPr lang="en-US" sz="1500" b="1" kern="0" spc="150" dirty="0">
-                <a:solidFill>
-                  <a:srgbClr val="C9CEDA"/>
-                </a:solidFill>
-                <a:latin typeface="Calibri" pitchFamily="34" charset="0"/>
-                <a:ea typeface="Calibri" pitchFamily="34" charset="-122"/>
-                <a:cs typeface="Calibri" pitchFamily="34" charset="-120"/>
-              </a:rPr>
-              <a:t>SE DIFFÉRENCIER</a:t>
-            </a:r>
-            <a:endParaRPr lang="en-US" sz="1500" dirty="0"/>
-          </a:p>
-        </p:txBody>
-      </p:sp>
-      <p:sp>
-        <p:nvSpPr>
-          <p:cNvPr id="5" name="Text 2"/>
-          <p:cNvSpPr/>
-          <p:nvPr/>
-        </p:nvSpPr>
-        <p:spPr>
-          <a:xfrm>
-            <a:off x="731520" y="2468880"/>
-            <a:ext cx="6949440" cy="1920240"/>
-          </a:xfrm>
-          <a:prstGeom prst="rect">
-            <a:avLst/>
-          </a:prstGeom>
-          <a:noFill/>
-          <a:ln/>
-        </p:spPr>
-        <p:txBody>
-          <a:bodyPr wrap="square" lIns="0" tIns="0" rIns="0" bIns="0" rtlCol="0" anchor="ctr"/>
-          <a:lstStyle/>
-          <a:p>
-            <a:pPr marL="0" indent="0">
-              <a:lnSpc>
-                <a:spcPct val="105000"/>
-              </a:lnSpc>
-              <a:buNone/>
-            </a:pPr>
-            <a:r>
-              <a:rPr lang="fr-FR" sz="4600" b="1" noProof="0" dirty="0">
-                <a:solidFill>
-                  <a:srgbClr val="FFFFFF"/>
-                </a:solidFill>
-                <a:latin typeface="Montserrat" pitchFamily="34" charset="0"/>
-                <a:ea typeface="Montserrat" pitchFamily="34" charset="-122"/>
-                <a:cs typeface="Montserrat" pitchFamily="34" charset="-120"/>
-              </a:rPr>
-              <a:t>Positionnement</a:t>
-            </a:r>
-            <a:endParaRPr lang="fr-FR" sz="4600" noProof="0" dirty="0"/>
-          </a:p>
-        </p:txBody>
-      </p:sp>
-      <p:sp>
-        <p:nvSpPr>
-          <p:cNvPr id="6" name="Shape 3"/>
-          <p:cNvSpPr/>
-          <p:nvPr/>
-        </p:nvSpPr>
-        <p:spPr>
-          <a:xfrm>
-            <a:off x="749808" y="2212848"/>
-            <a:ext cx="640080" cy="45720"/>
-          </a:xfrm>
-          <a:prstGeom prst="rect">
-            <a:avLst/>
-          </a:prstGeom>
-          <a:solidFill>
-            <a:srgbClr val="4D6AB1"/>
-          </a:solidFill>
-          <a:ln/>
-        </p:spPr>
-        <p:txBody>
-          <a:bodyPr/>
-          <a:lstStyle/>
-          <a:p>
-            <a:endParaRPr lang="fr-FR"/>
-          </a:p>
-        </p:txBody>
-      </p:sp>
-      <p:sp>
-        <p:nvSpPr>
-          <p:cNvPr id="7" name="Text 4"/>
-          <p:cNvSpPr/>
-          <p:nvPr/>
-        </p:nvSpPr>
-        <p:spPr>
-          <a:xfrm>
-            <a:off x="731520" y="4572000"/>
-            <a:ext cx="6400800" cy="1005840"/>
-          </a:xfrm>
-          <a:prstGeom prst="rect">
-            <a:avLst/>
-          </a:prstGeom>
-          <a:noFill/>
-          <a:ln/>
-        </p:spPr>
-        <p:txBody>
-          <a:bodyPr wrap="square" lIns="0" tIns="0" rIns="0" bIns="0" rtlCol="0" anchor="ctr"/>
-          <a:lstStyle/>
-          <a:p>
-            <a:pPr marL="0" indent="0">
-              <a:lnSpc>
-                <a:spcPct val="130000"/>
-              </a:lnSpc>
-              <a:buNone/>
-            </a:pPr>
-            <a:r>
-              <a:rPr lang="fr-FR" sz="1500" noProof="0" dirty="0">
-                <a:solidFill>
-                  <a:srgbClr val="C9CEDA"/>
-                </a:solidFill>
-                <a:latin typeface="Calibri" pitchFamily="34" charset="0"/>
-                <a:ea typeface="Calibri" pitchFamily="34" charset="-122"/>
-                <a:cs typeface="Calibri" pitchFamily="34" charset="-120"/>
-              </a:rPr>
-              <a:t>Ceux avec quoi KWISMO se différencie par rapport à la concurrence.</a:t>
-            </a:r>
-            <a:endParaRPr lang="fr-FR" sz="1500" noProof="0" dirty="0"/>
-          </a:p>
-        </p:txBody>
-      </p:sp>
-      <p:sp>
-        <p:nvSpPr>
-          <p:cNvPr id="8" name="Shape 5"/>
-          <p:cNvSpPr/>
-          <p:nvPr/>
-        </p:nvSpPr>
-        <p:spPr>
-          <a:xfrm>
-            <a:off x="9144000" y="1463040"/>
-            <a:ext cx="3931920" cy="3931920"/>
-          </a:xfrm>
-          <a:prstGeom prst="ellipse">
-            <a:avLst/>
-          </a:prstGeom>
-          <a:ln w="15875">
-            <a:solidFill>
-              <a:srgbClr val="4D6AB1">
-                <a:alpha val="45000"/>
-              </a:srgbClr>
-            </a:solidFill>
-            <a:prstDash val="solid"/>
-          </a:ln>
-        </p:spPr>
-        <p:txBody>
-          <a:bodyPr/>
-          <a:lstStyle/>
-          <a:p>
-            <a:endParaRPr lang="fr-FR"/>
-          </a:p>
-        </p:txBody>
-      </p:sp>
-      <p:sp>
-        <p:nvSpPr>
-          <p:cNvPr id="9" name="Shape 6"/>
-          <p:cNvSpPr/>
-          <p:nvPr/>
-        </p:nvSpPr>
-        <p:spPr>
-          <a:xfrm>
-            <a:off x="9464040" y="1783080"/>
-            <a:ext cx="3291840" cy="3291840"/>
-          </a:xfrm>
-          <a:prstGeom prst="ellipse">
-            <a:avLst/>
-          </a:prstGeom>
-          <a:solidFill>
-            <a:srgbClr val="4D6AB1">
-              <a:alpha val="15000"/>
-            </a:srgbClr>
-          </a:solidFill>
-          <a:ln w="19050">
-            <a:solidFill>
-              <a:srgbClr val="4D6AB1">
-                <a:alpha val="75000"/>
-              </a:srgbClr>
-            </a:solidFill>
-            <a:prstDash val="solid"/>
-          </a:ln>
-        </p:spPr>
-        <p:txBody>
-          <a:bodyPr/>
-          <a:lstStyle/>
-          <a:p>
-            <a:endParaRPr lang="fr-FR"/>
-          </a:p>
-        </p:txBody>
-      </p:sp>
-      <p:pic>
-        <p:nvPicPr>
-          <p:cNvPr id="10" name="Image 1" descr="/home/claude/work/icons/layers_FFFFFF.png"/>
-          <p:cNvPicPr>
-            <a:picLocks noChangeAspect="1"/>
-          </p:cNvPicPr>
-          <p:nvPr/>
-        </p:nvPicPr>
-        <p:blipFill>
-          <a:blip r:embed="rId4"/>
-          <a:stretch>
-            <a:fillRect/>
-          </a:stretch>
-        </p:blipFill>
-        <p:spPr>
-          <a:xfrm>
-            <a:off x="10254082" y="2573122"/>
-            <a:ext cx="1711757" cy="1711757"/>
-          </a:xfrm>
-          <a:prstGeom prst="rect">
-            <a:avLst/>
-          </a:prstGeom>
-        </p:spPr>
-      </p:pic>
-      <p:sp>
-        <p:nvSpPr>
-          <p:cNvPr id="11" name="Text 7"/>
-          <p:cNvSpPr/>
-          <p:nvPr/>
-        </p:nvSpPr>
-        <p:spPr>
-          <a:xfrm>
-            <a:off x="11368735" y="6400800"/>
-            <a:ext cx="548640" cy="292608"/>
-          </a:xfrm>
-          <a:prstGeom prst="rect">
-            <a:avLst/>
-          </a:prstGeom>
-          <a:noFill/>
-          <a:ln/>
-        </p:spPr>
-        <p:txBody>
-          <a:bodyPr wrap="square" lIns="0" tIns="0" rIns="0" bIns="0" rtlCol="0" anchor="ctr"/>
-          <a:lstStyle/>
-          <a:p>
-            <a:pPr marL="0" indent="0" algn="r">
-              <a:buNone/>
-            </a:pPr>
-            <a:r>
-              <a:rPr lang="en-US" sz="1100" dirty="0">
-                <a:solidFill>
-                  <a:srgbClr val="8891A3"/>
-                </a:solidFill>
-                <a:latin typeface="Calibri" pitchFamily="34" charset="0"/>
-                <a:ea typeface="Calibri" pitchFamily="34" charset="-122"/>
-                <a:cs typeface="Calibri" pitchFamily="34" charset="-120"/>
-              </a:rPr>
-              <a:t>20</a:t>
-            </a:r>
-            <a:endParaRPr lang="en-US" sz="1100" dirty="0"/>
-          </a:p>
-        </p:txBody>
-      </p:sp>
-    </p:spTree>
-  </p:cSld>
-  <p:clrMapOvr>
-    <a:masterClrMapping/>
-  </p:clrMapOvr>
-</p:sld>
-</file>
-
-<file path=ppt/slides/slide21.xml><?xml version="1.0" encoding="utf-8"?>
 <p:sld xmlns:a="http://schemas.openxmlformats.org/drawingml/2006/main" xmlns:r="http://schemas.openxmlformats.org/officeDocument/2006/relationships" xmlns:p="http://schemas.openxmlformats.org/presentationml/2006/main">
   <p:cSld name="Slide 18">
     <p:bg>
@@ -12132,7 +11759,7 @@
                 <a:ea typeface="Calibri" pitchFamily="34" charset="-122"/>
                 <a:cs typeface="Calibri" pitchFamily="34" charset="-120"/>
               </a:rPr>
-              <a:t>21</a:t>
+              <a:t>20</a:t>
             </a:r>
             <a:endParaRPr lang="en-US" sz="1100" dirty="0"/>
           </a:p>
@@ -12146,7 +11773,7 @@
 </p:sld>
 </file>
 
-<file path=ppt/slides/slide22.xml><?xml version="1.0" encoding="utf-8"?>
+<file path=ppt/slides/slide21.xml><?xml version="1.0" encoding="utf-8"?>
 <p:sld xmlns:a="http://schemas.openxmlformats.org/drawingml/2006/main" xmlns:r="http://schemas.openxmlformats.org/officeDocument/2006/relationships" xmlns:p="http://schemas.openxmlformats.org/presentationml/2006/main">
   <p:cSld name="Slide 20">
     <p:bg>
@@ -12508,7 +12135,7 @@
                 <a:ea typeface="Calibri" pitchFamily="34" charset="-122"/>
                 <a:cs typeface="Calibri" pitchFamily="34" charset="-120"/>
               </a:rPr>
-              <a:t>22</a:t>
+              <a:t>21</a:t>
             </a:r>
             <a:endParaRPr lang="en-US" sz="1100" dirty="0"/>
           </a:p>
@@ -12522,7 +12149,7 @@
 </p:sld>
 </file>
 
-<file path=ppt/slides/slide23.xml><?xml version="1.0" encoding="utf-8"?>
+<file path=ppt/slides/slide22.xml><?xml version="1.0" encoding="utf-8"?>
 <p:sld xmlns:a="http://schemas.openxmlformats.org/drawingml/2006/main" xmlns:r="http://schemas.openxmlformats.org/officeDocument/2006/relationships" xmlns:p="http://schemas.openxmlformats.org/presentationml/2006/main">
   <p:cSld name="Slide 21">
     <p:bg>
@@ -14285,7 +13912,7 @@
                 <a:ea typeface="Calibri" pitchFamily="34" charset="-122"/>
                 <a:cs typeface="Calibri" pitchFamily="34" charset="-120"/>
               </a:rPr>
-              <a:t>23</a:t>
+              <a:t>22</a:t>
             </a:r>
             <a:endParaRPr lang="en-US" sz="1100" dirty="0"/>
           </a:p>
@@ -14299,7 +13926,7 @@
 </p:sld>
 </file>
 
-<file path=ppt/slides/slide24.xml><?xml version="1.0" encoding="utf-8"?>
+<file path=ppt/slides/slide23.xml><?xml version="1.0" encoding="utf-8"?>
 <p:sld xmlns:a="http://schemas.openxmlformats.org/drawingml/2006/main" xmlns:r="http://schemas.openxmlformats.org/officeDocument/2006/relationships" xmlns:p="http://schemas.openxmlformats.org/presentationml/2006/main">
   <p:cSld name="Slide 22">
     <p:bg>
@@ -14661,7 +14288,7 @@
                 <a:ea typeface="Calibri" pitchFamily="34" charset="-122"/>
                 <a:cs typeface="Calibri" pitchFamily="34" charset="-120"/>
               </a:rPr>
-              <a:t>24</a:t>
+              <a:t>23</a:t>
             </a:r>
             <a:endParaRPr lang="en-US" sz="1100" dirty="0"/>
           </a:p>
@@ -14675,7 +14302,7 @@
 </p:sld>
 </file>
 
-<file path=ppt/slides/slide25.xml><?xml version="1.0" encoding="utf-8"?>
+<file path=ppt/slides/slide24.xml><?xml version="1.0" encoding="utf-8"?>
 <p:sld xmlns:a="http://schemas.openxmlformats.org/drawingml/2006/main" xmlns:r="http://schemas.openxmlformats.org/officeDocument/2006/relationships" xmlns:p="http://schemas.openxmlformats.org/presentationml/2006/main">
   <p:cSld name="Slide 23">
     <p:bg>
@@ -16657,7 +16284,7 @@
                 <a:ea typeface="Calibri" pitchFamily="34" charset="-122"/>
                 <a:cs typeface="Calibri" pitchFamily="34" charset="-120"/>
               </a:rPr>
-              <a:t>25</a:t>
+              <a:t>24</a:t>
             </a:r>
             <a:endParaRPr lang="en-US" sz="1100" dirty="0"/>
           </a:p>
@@ -16671,7 +16298,7 @@
 </p:sld>
 </file>
 
-<file path=ppt/slides/slide26.xml><?xml version="1.0" encoding="utf-8"?>
+<file path=ppt/slides/slide25.xml><?xml version="1.0" encoding="utf-8"?>
 <p:sld xmlns:a="http://schemas.openxmlformats.org/drawingml/2006/main" xmlns:r="http://schemas.openxmlformats.org/officeDocument/2006/relationships" xmlns:p="http://schemas.openxmlformats.org/presentationml/2006/main">
   <p:cSld name="Slide 24">
     <p:bg>
@@ -17157,7 +16784,7 @@
                 <a:ea typeface="Calibri" pitchFamily="34" charset="-122"/>
                 <a:cs typeface="Calibri" pitchFamily="34" charset="-120"/>
               </a:rPr>
-              <a:t>26</a:t>
+              <a:t>25</a:t>
             </a:r>
             <a:endParaRPr lang="en-US" sz="1100" dirty="0"/>
           </a:p>
